--- a/en/slides/12-Computer_Architecture-Verm1_Part_2-Code.pptx
+++ b/en/slides/12-Computer_Architecture-Verm1_Part_2-Code.pptx
@@ -131,23 +131,35 @@
   <p:extLst>
     <p:ext uri="{521415D9-36F7-43E2-AB2F-B90AF26B5E84}">
       <p14:sectionLst xmlns:p14="http://schemas.microsoft.com/office/powerpoint/2010/main">
-        <p14:section name="Opening" id="{a0bb7c07-e8e2-3f57-8f8d-3093bcda80eb}">
+        <p14:section name="Opening" id="{1f8a2dbd-cce4-62b6-2404-ae74b5098a8a}">
           <p14:sldIdLst>
             <p14:sldId id="256"/>
             <p14:sldId id="257"/>
           </p14:sldIdLst>
         </p14:section>
-        <p14:section name="The listings" id="{93cf66cd-cb71-422b-48e0-0876cadce018}">
+        <p14:section name="The listings" id="{a5b45a34-8df7-3db4-44ee-909836fae3bd}">
           <p14:sldIdLst>
             <p14:sldId id="258"/>
+          </p14:sldIdLst>
+        </p14:section>
+        <p14:section name="Step 1: names for bits" id="{681533d3-378e-a77e-65d6-8ccba4464261}">
+          <p14:sldIdLst>
             <p14:sldId id="259"/>
             <p14:sldId id="260"/>
+          </p14:sldIdLst>
+        </p14:section>
+        <p14:section name="Step 2: steering" id="{fcdbdf5d-cb84-017a-9e67-c57d6210e618}">
+          <p14:sldIdLst>
             <p14:sldId id="261"/>
             <p14:sldId id="262"/>
             <p14:sldId id="263"/>
             <p14:sldId id="264"/>
             <p14:sldId id="265"/>
             <p14:sldId id="266"/>
+          </p14:sldIdLst>
+        </p14:section>
+        <p14:section name="Step 3: food, a score, a sound" id="{08c57ee5-87a3-ab0f-e253-379b466c2b46}">
+          <p14:sldIdLst>
             <p14:sldId id="267"/>
             <p14:sldId id="268"/>
             <p14:sldId id="269"/>
@@ -158,7 +170,7 @@
             <p14:sldId id="274"/>
           </p14:sldIdLst>
         </p14:section>
-        <p14:section name="Run it and test it" id="{5a06140e-0689-f62b-8788-e20b58edbfe0}">
+        <p14:section name="Run it and test it" id="{2a3aa97c-90cd-04ea-5c6f-36bf85027a4e}">
           <p14:sldIdLst>
             <p14:sldId id="275"/>
             <p14:sldId id="276"/>
@@ -167,7 +179,7 @@
             <p14:sldId id="279"/>
           </p14:sldIdLst>
         </p14:section>
-        <p14:section name="Exercises" id="{252e8de0-6f1f-f858-e1b9-56f93a169f8f}">
+        <p14:section name="Exercises" id="{1b6a11c8-73e1-f0b9-aa08-b707c47c0c84}">
           <p14:sldIdLst>
             <p14:sldId id="280"/>
           </p14:sldIdLst>
@@ -2266,7 +2278,7 @@
           <a:p>
             <a:r>
               <a:rPr lang="en-US" dirty="0"/>
-              <a:t>Add these lines to the constants of Part 1. RED is the colour of the food. The four BTN_ constants are masks: each has a single bit at 1, the bit of that button in the word returned by the runtime. The four DIR_ constants are the codes of the directions, numbers from 0 to 3, that is two bits. The comments say what each of the two bits means, and the next slide explains why the codes were chosen in this way.
+              <a:t>Add these lines to the constants of Part 1. RED is the colour of the food. The four BTN_ constants are masks: each has a single bit at 1, the bit of that button in the word returned by the runtime. The four DIR_ constants are the codes of the directions, numbers from 0 to 3, that is two bits. The comments say what each of the two bits means, and the lecture deck, in the slide "A code chosen with care", explains why the codes were chosen in this way.
 For the lecturer: Add the lines from RED and from BTN_LEFT to DIR_UP to the constants of Part 1.</a:t>
             </a:r>
             <a:endParaRPr lang="en-US" dirty="0"/>
@@ -3725,7 +3737,63 @@
       </p:sp>
       <p:sp>
         <p:nvSpPr>
-          <p:cNvPr id="12" name="Shape 10"/>
+          <p:cNvPr id="12" name="Text 10"/>
+          <p:cNvSpPr txBox="1"/>
+          <p:nvPr/>
+        </p:nvSpPr>
+        <p:spPr>
+          <a:xfrm>
+            <a:off x="4693615" y="566928"/>
+            <a:ext cx="6949440" cy="640080"/>
+          </a:xfrm>
+          <a:prstGeom prst="rect">
+            <a:avLst/>
+          </a:prstGeom>
+          <a:noFill/>
+          <a:ln/>
+        </p:spPr>
+        <p:txBody>
+          <a:bodyPr wrap="square" lIns="0" tIns="0" rIns="0" bIns="0" rtlCol="0" anchor="t"/>
+          <a:lstStyle/>
+          <a:p>
+            <a:pPr algn="r" indent="0" marL="0">
+              <a:buNone/>
+            </a:pPr>
+            <a:r>
+              <a:rPr lang="en-US" sz="1300" dirty="0">
+                <a:solidFill>
+                  <a:srgbClr val="CFE3EA"/>
+                </a:solidFill>
+                <a:latin typeface="Calibri" pitchFamily="34" charset="0"/>
+                <a:ea typeface="Calibri" pitchFamily="34" charset="-122"/>
+                <a:cs typeface="Calibri" pitchFamily="34" charset="-120"/>
+              </a:rPr>
+              <a:t>Code deck. The concepts, the figures and the questions are in the lecture deck:</a:t>
+            </a:r>
+            <a:endParaRPr lang="en-US" sz="1300" dirty="0"/>
+          </a:p>
+          <a:p>
+            <a:pPr algn="r" indent="0" marL="0">
+              <a:buNone/>
+            </a:pPr>
+            <a:r>
+              <a:rPr lang="en-US" sz="1300" dirty="0">
+                <a:solidFill>
+                  <a:srgbClr val="CFE3EA"/>
+                </a:solidFill>
+                <a:latin typeface="Calibri" pitchFamily="34" charset="0"/>
+                <a:ea typeface="Calibri" pitchFamily="34" charset="-122"/>
+                <a:cs typeface="Calibri" pitchFamily="34" charset="-120"/>
+              </a:rPr>
+              <a:t>12-Computer_Architecture-Verm1_Part_2.pptx</a:t>
+            </a:r>
+            <a:endParaRPr lang="en-US" sz="1300" dirty="0"/>
+          </a:p>
+        </p:txBody>
+      </p:sp>
+      <p:sp>
+        <p:nvSpPr>
+          <p:cNvPr id="13" name="Shape 11"/>
           <p:cNvSpPr/>
           <p:nvPr/>
         </p:nvSpPr>
@@ -3752,7 +3820,7 @@
       </p:sp>
       <p:pic>
         <p:nvPicPr>
-          <p:cNvPr id="13" name="Image 0" descr="/Users/raffaelemontella/devel/riscv-prg32/computer-architecture-with-prg32/tools/assets/verm1_p2.png">    </p:cNvPr>
+          <p:cNvPr id="14" name="Image 0" descr="/Users/raffaelemontella/devel/riscv-prg32/computer-architecture-with-prg32/tools/assets/verm1_p2.png">    </p:cNvPr>
           <p:cNvPicPr>
             <a:picLocks noChangeAspect="1"/>
           </p:cNvPicPr>
@@ -18183,7 +18251,7 @@
                 <a:ea typeface="Calibri" pitchFamily="34" charset="-122"/>
                 <a:cs typeface="Calibri" pitchFamily="34" charset="-120"/>
               </a:rPr>
-              <a:t>The codes are not arbitrary: see the next slide</a:t>
+              <a:t>The codes are not arbitrary: see the lecture deck</a:t>
             </a:r>
             <a:endParaRPr lang="en-US" sz="1500" dirty="0"/>
           </a:p>

--- a/en/slides/12-Computer_Architecture-Verm1_Part_2-Code.pptx
+++ b/en/slides/12-Computer_Architecture-Verm1_Part_2-Code.pptx
@@ -131,24 +131,24 @@
   <p:extLst>
     <p:ext uri="{521415D9-36F7-43E2-AB2F-B90AF26B5E84}">
       <p14:sectionLst xmlns:p14="http://schemas.microsoft.com/office/powerpoint/2010/main">
-        <p14:section name="Opening" id="{1f8a2dbd-cce4-62b6-2404-ae74b5098a8a}">
+        <p14:section name="Opening" id="{37135e02-3563-3c3c-11a2-f188c06d54d4}">
           <p14:sldIdLst>
             <p14:sldId id="256"/>
             <p14:sldId id="257"/>
           </p14:sldIdLst>
         </p14:section>
-        <p14:section name="The listings" id="{a5b45a34-8df7-3db4-44ee-909836fae3bd}">
+        <p14:section name="The listings" id="{0169ec41-76b4-a940-6e7d-5b2c65ff2a5e}">
           <p14:sldIdLst>
             <p14:sldId id="258"/>
           </p14:sldIdLst>
         </p14:section>
-        <p14:section name="Step 1: names for bits" id="{681533d3-378e-a77e-65d6-8ccba4464261}">
+        <p14:section name="Step 1: names for bits" id="{12be490b-aadb-b9bc-fddd-6c3f559defbd}">
           <p14:sldIdLst>
             <p14:sldId id="259"/>
             <p14:sldId id="260"/>
           </p14:sldIdLst>
         </p14:section>
-        <p14:section name="Step 2: steering" id="{fcdbdf5d-cb84-017a-9e67-c57d6210e618}">
+        <p14:section name="Step 2: steering" id="{ac7ae535-2c9f-fc78-798e-a61fb347c97f}">
           <p14:sldIdLst>
             <p14:sldId id="261"/>
             <p14:sldId id="262"/>
@@ -158,7 +158,7 @@
             <p14:sldId id="266"/>
           </p14:sldIdLst>
         </p14:section>
-        <p14:section name="Step 3: food, a score, a sound" id="{08c57ee5-87a3-ab0f-e253-379b466c2b46}">
+        <p14:section name="Step 3: food, a score, a sound" id="{d84ee47f-c216-9010-d955-088028ba0eb9}">
           <p14:sldIdLst>
             <p14:sldId id="267"/>
             <p14:sldId id="268"/>
@@ -170,7 +170,7 @@
             <p14:sldId id="274"/>
           </p14:sldIdLst>
         </p14:section>
-        <p14:section name="Run it and test it" id="{2a3aa97c-90cd-04ea-5c6f-36bf85027a4e}">
+        <p14:section name="Run it and test it" id="{ca7678f6-1da8-b943-eff7-34961a1e27ab}">
           <p14:sldIdLst>
             <p14:sldId id="275"/>
             <p14:sldId id="276"/>
@@ -179,7 +179,7 @@
             <p14:sldId id="279"/>
           </p14:sldIdLst>
         </p14:section>
-        <p14:section name="Exercises" id="{1b6a11c8-73e1-f0b9-aa08-b707c47c0c84}">
+        <p14:section name="Exercises" id="{6b1e5a48-dc92-ee62-6952-a7bc0c4b5f01}">
           <p14:sldIdLst>
             <p14:sldId id="280"/>
           </p14:sldIdLst>
@@ -588,7 +588,9 @@
           <a:p>
             <a:r>
               <a:rPr lang="en-US" dirty="0"/>
-              <a:t>This is the code deck of Lecture 12. The lecture deck holds the concepts; this one holds everything you type and run: the listings with their explanation, the complete program, what it shows, and the way to test it on each of the three hosts.</a:t>
+              <a:t>This is the code deck of Lecture 12. The lecture deck holds the concepts; this one holds everything you type and run: the listings with their explanation, the complete program, what it shows, and the way to test it on each of the three hosts.
+Learning status: UNDERSTAND NOW, by the end of this lecture you explain it, trace it and apply it on your own; USE NOW, you follow and use the recipe today; how it works inside is explained later, or is not part of the course; UNDERSTAND LATER, recognise the name and what it is for; a later lecture explains it. A slide without a badge is context: a story, an example, a question, an exercise.
+Learning status of this lecture. UNDERSTAND NOW: bit masks; codes; arrays in memory; pull-up inputs; Boolean algebra; fixed point; multiplexers; signed or unsigned instructions; comparators and parity; arguments in a0 to a7. USE NOW: the calling convention (Lecture 18) and, used without being studied in this course, the PRG32 tools, the PRG32 runtime calls, the PRG32-QT debugger. UNDERSTAND LATER: nothing. A slide without a badge is context: a story, an example, a question, an exercise.</a:t>
             </a:r>
             <a:endParaRPr lang="en-US" dirty="0"/>
           </a:p>
@@ -944,6 +946,7 @@
             <a:r>
               <a:rPr lang="en-US" dirty="0"/>
               <a:t>place_food asks the runtime for two random numbers. The contract of prg32_random_number is: minimum in a0, maximum in a1, both included, result in a0. The first call gives a column from 0 to 39, the second a row from 0 to 23, and each is stored in its variable. One defect is left on purpose: the food may fall exactly on the head. Part 3, when the worm has a body, will correct it.
+USE NOW: the PRG32 runtime calls (used, not studied, in this course).
 For the lecturer: The random numbers come from the runtime: on the board from the hardware generator of the ESP32-C6. Two runs of the game are different.</a:t>
             </a:r>
             <a:endParaRPr lang="en-US" dirty="0"/>
@@ -1033,6 +1036,7 @@
             <a:r>
               <a:rPr lang="en-US" dirty="0"/>
               <a:t>This replaces the temporary ending of step. It is a comparator built from instructions: xor of the food's column and the head's column is 0 when they are equal; the same for the rows; or of the two results is 0 only if both are equal. If the result is not zero, the function ends. Otherwise the worm has eaten: the score is increased by one, new food is placed, and a sound is played. It is the AND of XNORs of Lecture 11, written with two xor and one or.
+UNDERSTAND NOW: comparators and parity.
 For the lecturer: A comparator for equality is a row of XOR gates followed by an OR: Lecture 11. Here it is two xor and one or. The registers t4 and t6 still hold the new column and row; after the calls they are no longer needed, which is why it is safe to keep them in temporaries.</a:t>
             </a:r>
             <a:endParaRPr lang="en-US" dirty="0"/>
@@ -1122,6 +1126,7 @@
             <a:r>
               <a:rPr lang="en-US" dirty="0"/>
               <a:t>eat_sound plays one note. prg32_audio_note takes five arguments, in a0 to a4: channel, instrument, note, volume and duration in milliseconds. Note 72 is the C of the fifth octave in MIDI numbering. The last callout repeats a principle of PRG32: sound comes last. The game worked without it, and it is added when everything else is solid.
+USE NOW: the PRG32 runtime calls (used, not studied, in this course).
 For the lecturer: prg32_audio_note(channel, instrument, note, volume, milliseconds). On PRG32-QT the note is played by the computer; on the board by the amplifier and its speaker.</a:t>
             </a:r>
             <a:endParaRPr lang="en-US" dirty="0"/>
@@ -1211,6 +1216,7 @@
             <a:r>
               <a:rPr lang="en-US" dirty="0"/>
               <a:t>The beginning of the new verm1_draw: after the title, a loop draws one small rectangle for each point of the score, 4 pixels apart. The counter of the loop is in s0, not in a t register, because it must survive the calls to prg32_gfx_rect: a function may destroy the temporaries, but preserves the s registers. In exchange your own function must save s0 in its frame and restore it at the end. This convention is studied in Lecture 18.
+USE NOW: the calling convention (studied in Lecture 18).
 For the lecturer: Replace the beginning of verm1_draw. A t register may be destroyed by any call; an s register is preserved, provided that we save and restore it ourselves: the convention, met in Lecture 02, is studied in Lecture 18. Digits arrive in Part 4, when division is available.</a:t>
             </a:r>
             <a:endParaRPr lang="en-US" dirty="0"/>
@@ -1300,6 +1306,7 @@
             <a:r>
               <a:rPr lang="en-US" dirty="0"/>
               <a:t>The rest of verm1_draw: the same three lines twice, first for the food and then for the head: load the column, load the row, load the colour, and call draw_cell. The order matters: the head is drawn last, so that it covers the food if they are in the same cell. Then s0 and ra are restored and the function returns.
+UNDERSTAND NOW: arguments in a0 to a7.
 For the lecturer: This is the rest of verm1_draw: it replaces the rectangle of Part 1.</a:t>
             </a:r>
             <a:endParaRPr lang="en-US" dirty="0"/>
@@ -1389,6 +1396,7 @@
             <a:r>
               <a:rPr lang="en-US" dirty="0"/>
               <a:t>draw_cell gathers in one function the arithmetic that Part 1 had inside draw: column times 8, row times 8 plus TOP. Its contract is written in the comment on its first line: column in a0, row in a1, colour in a2. One subtlety: prg32_gfx_rect wants the colour in a4, and a2 is about to be overwritten with the width, so the colour must be moved first. Writing the contract of a function in a comment is part of the job.
+UNDERSTAND NOW: arguments in a0 to a7.
 For the lecturer: A function with a contract: a0 = column, a1 = row, a2 = colour. Writing the contract in a comment is part of the job.</a:t>
             </a:r>
             <a:endParaRPr lang="en-US" dirty="0"/>
@@ -1745,6 +1753,7 @@
             <a:r>
               <a:rPr lang="en-US" dirty="0"/>
               <a:t>The quickest way: PRG32-QT on your own computer. Four steps, each with its command. PRG32-QT behaves like a board on port 8080, which is why the upload command says esp32c6. With debug mode enabled you can stop at any instruction and read registers and memory.
+USE NOW: the PRG32 tools (used, not studied, in this course).
 For the lecturer: Run by the tests: the cartridge of this slide is built with this command and executed on the headless runner of PRG32-QT. Without the toolchain: import the .prg32 file in PRG32-QT and choose Run Cartridge. Keys: arrows or WASD for the joystick, Z or J for A, X or K for B, Enter for Start, Escape to go back to Setup.</a:t>
             </a:r>
             <a:endParaRPr lang="en-US" dirty="0"/>
@@ -1834,6 +1843,7 @@
             <a:r>
               <a:rPr lang="en-US" dirty="0"/>
               <a:t>The same program on the emulator. QEMU runs the real firmware on an emulated chip, so the cartridge must be built for the architecture qemu. Stage the cartridge while QEMU is closed. The firmware opens on the Setup menu: choose Run Cartridge and the slot. Remember that the keyboard is read by the terminal, not by the window with the picture.
+USE NOW: the PRG32 tools (used, not studied, in this course).
 For the lecturer: Checked by the tests up to the staging: the cartridge is built for the architecture qemu and accepted into the flash image of the emulator. What the emulator then shows is not checked automatically: Espressif QEMU needs its window. Since October 2026 the firmware starts on Setup: choose Run Cartridge, then cart0.</a:t>
             </a:r>
             <a:endParaRPr lang="en-US" dirty="0"/>
@@ -1923,6 +1933,7 @@
             <a:r>
               <a:rPr lang="en-US" dirty="0"/>
               <a:t>The same program on the kit. The firmware is written once, through USB; after that cartridges travel over Wi-Fi. The upload command is the one used for PRG32-QT with the address of the board. This is the only host that the automatic tests do not run: try it, and report what you see.
+USE NOW: the PRG32 tools (used, not studied, in this course).
 For the lecturer: Not run by the tests: there is no board on the test machine. The cartridge for the architecture esp32c6 is built by the tests; the steps are those of the PRG32 documentation. If the serial port is not found pass it explicitly. To use the Wi-Fi of the classroom: python3 -m prg32 wifi set --ssid NAME --password PASSWORD --mode sta.</a:t>
             </a:r>
             <a:endParaRPr lang="en-US" dirty="0"/>
@@ -2012,6 +2023,7 @@
             <a:r>
               <a:rPr lang="en-US" dirty="0"/>
               <a:t>The five most common symptoms, what each means, and what to do. Read the message before changing anything: it nearly always names the cause.
+USE NOW: the PRG32 tools (used, not studied, in this course).
 For the lecturer: The first three rows cover most cases. When asking for help, paste the command and the whole message as text. docs/usage/troubleshooting.md of the PRG32 repository has the complete list.</a:t>
             </a:r>
             <a:endParaRPr lang="en-US" dirty="0"/>
@@ -2190,6 +2202,7 @@
             <a:r>
               <a:rPr lang="en-US" dirty="0"/>
               <a:t>The same two commands as in Part 1: build the cartridge, then upload it to PRG32-QT and run it. Keep PRG32-QT open for the whole session, with the debug mode enabled if you want the debugger at hand: step 4 uses it.
+USE NOW: the PRG32 tools (used, not studied, in this course).
 For the lecturer: The same two commands of Part 1. PRG32-QT must be running, with Run cartridges in RISC-V debug mode enabled in Settings if you want the debugger.</a:t>
             </a:r>
             <a:endParaRPr lang="en-US" dirty="0"/>
@@ -2279,6 +2292,7 @@
             <a:r>
               <a:rPr lang="en-US" dirty="0"/>
               <a:t>Add these lines to the constants of Part 1. RED is the colour of the food. The four BTN_ constants are masks: each has a single bit at 1, the bit of that button in the word returned by the runtime. The four DIR_ constants are the codes of the directions, numbers from 0 to 3, that is two bits. The comments say what each of the two bits means, and the lecture deck, in the slide "A code chosen with care", explains why the codes were chosen in this way.
+UNDERSTAND NOW: bit masks.
 For the lecturer: Add the lines from RED and from BTN_LEFT to DIR_UP to the constants of Part 1.</a:t>
             </a:r>
             <a:endParaRPr lang="en-US" dirty="0"/>
@@ -2368,6 +2382,7 @@
             <a:r>
               <a:rPr lang="en-US" dirty="0"/>
               <a:t>Replace the data of Part 1 with these. In .rodata there are two tables of four words, dx and dy: for each direction code, the change of column and the change of row. They never change, so they live with the constants. In .data there are five new variables: dir, the direction of the last step; want, the direction the player has asked for; and score, food_x and food_y, which are used in step 3.
+UNDERSTAND NOW: arrays in memory.
 For the lecturer: Replace the data of Part 1 with this. The initial values are enough for step 2: init is completed in step 3.</a:t>
             </a:r>
             <a:endParaRPr lang="en-US" dirty="0"/>
@@ -2457,6 +2472,7 @@
             <a:r>
               <a:rPr lang="en-US" dirty="0"/>
               <a:t>This replaces the beginning of verm1_update. After the call to prg32_input_read, t1 receives the current direction and t2 the current wish. Then four identical blocks: andi isolates one button; if the result is zero the next instruction is skipped; otherwise the wish in t2 is overwritten with that direction. Finally the rule: the XOR of wish and direction is compared with 2; if they are equal the request is a U-turn and the sw is skipped, so the old wish survives. update now makes a call, so it has a stack frame.
+UNDERSTAND NOW: bit masks.
 For the lecturer: This replaces the beginning of verm1_update. update now calls a function, so it needs a stack frame. With two buttons pressed the last test wins: UP beats LEFT beats DOWN beats RIGHT. The player's wish is stored in want and becomes the direction only at the next step: so two quick presses cannot fold the worm onto itself.</a:t>
             </a:r>
             <a:endParaRPr lang="en-US" dirty="0"/>
@@ -2546,6 +2562,7 @@
             <a:r>
               <a:rPr lang="en-US" dirty="0"/>
               <a:t>The rest of verm1_update is the fixed-point timer of Part 1, unchanged: add the speed, and when a whole cell has accumulated subtract 256. The only difference is what happens then: instead of moving head_x directly, the code calls a new function, step. The local labels here are 6 and 7 because the numbers from 1 to 5 are already used in the first half of the function.
+UNDERSTAND NOW: fixed point.
 For the lecturer: This is the rest of verm1_update. The lines that moved head_x in Part 1 are gone: they become the function step.</a:t>
             </a:r>
             <a:endParaRPr lang="en-US" dirty="0"/>
@@ -2635,6 +2652,7 @@
             <a:r>
               <a:rPr lang="en-US" dirty="0"/>
               <a:t>The first half of step. The wish becomes the direction: this happens once per step, not once per frame, so two quick presses cannot fold the worm back on itself. Then the lookup: the code of the direction is shifted left by 2, because each entry of a table is a word of four bytes, and added to the address of dx; the word loaded is the change of column, minus 1, 0 or plus 1. The same offset serves for dy. There is no branch: the code selects the value, as a multiplexer would.
+UNDERSTAND NOW: multiplexers.
 For the lecturer: A table in read-only memory addressed by a code is a ROM: Lecture 11. The alternative is four branches; the table is shorter, and changing the rules means changing data, not code.</a:t>
             </a:r>
             <a:endParaRPr lang="en-US" dirty="0"/>
@@ -2724,6 +2742,7 @@
             <a:r>
               <a:rPr lang="en-US" dirty="0"/>
               <a:t>The second half moves the head and handles the edges, in both directions. The column plus dx can now become minus 1: bgez tests the sign, and a negative column is replaced by the last column. If instead it has reached COLS, it becomes 0. The same is done for the row with ROWS. Note the last callout: t4 and t6 still hold the new column and row, and the next piece of code will use them.
+UNDERSTAND NOW: signed or unsigned instructions.
 For the lecturer: In Part 1 only the right edge existed. A negative column is a signed number: bgez and blt are the signed comparisons of Lecture 05.</a:t>
             </a:r>
             <a:endParaRPr lang="en-US" dirty="0"/>
@@ -3844,6 +3863,420 @@
       </p:pic>
       <p:sp>
         <p:nvSpPr>
+          <p:cNvPr id="15" name="Shape 12"/>
+          <p:cNvSpPr/>
+          <p:nvPr/>
+        </p:nvSpPr>
+        <p:spPr>
+          <a:xfrm>
+            <a:off x="9690303" y="91440"/>
+            <a:ext cx="1952752" cy="274320"/>
+          </a:xfrm>
+          <a:prstGeom prst="rect">
+            <a:avLst/>
+          </a:prstGeom>
+          <a:solidFill>
+            <a:srgbClr val="F3E8FF"/>
+          </a:solidFill>
+          <a:ln w="12700">
+            <a:solidFill>
+              <a:srgbClr val="7E22CE"/>
+            </a:solidFill>
+            <a:prstDash val="dash"/>
+          </a:ln>
+        </p:spPr>
+      </p:sp>
+      <p:sp>
+        <p:nvSpPr>
+          <p:cNvPr id="16" name="Shape 13"/>
+          <p:cNvSpPr/>
+          <p:nvPr/>
+        </p:nvSpPr>
+        <p:spPr>
+          <a:xfrm>
+            <a:off x="9717735" y="128016"/>
+            <a:ext cx="45720" cy="45720"/>
+          </a:xfrm>
+          <a:prstGeom prst="rect">
+            <a:avLst/>
+          </a:prstGeom>
+          <a:solidFill>
+            <a:srgbClr val="7E22CE"/>
+          </a:solidFill>
+          <a:ln w="12700">
+            <a:solidFill>
+              <a:srgbClr val="7E22CE"/>
+            </a:solidFill>
+            <a:prstDash val="solid"/>
+          </a:ln>
+        </p:spPr>
+      </p:sp>
+      <p:sp>
+        <p:nvSpPr>
+          <p:cNvPr id="17" name="Shape 14"/>
+          <p:cNvSpPr/>
+          <p:nvPr/>
+        </p:nvSpPr>
+        <p:spPr>
+          <a:xfrm>
+            <a:off x="9717735" y="205740"/>
+            <a:ext cx="45720" cy="45720"/>
+          </a:xfrm>
+          <a:prstGeom prst="rect">
+            <a:avLst/>
+          </a:prstGeom>
+          <a:solidFill>
+            <a:srgbClr val="7E22CE"/>
+          </a:solidFill>
+          <a:ln w="12700">
+            <a:solidFill>
+              <a:srgbClr val="7E22CE"/>
+            </a:solidFill>
+            <a:prstDash val="solid"/>
+          </a:ln>
+        </p:spPr>
+      </p:sp>
+      <p:sp>
+        <p:nvSpPr>
+          <p:cNvPr id="18" name="Shape 15"/>
+          <p:cNvSpPr/>
+          <p:nvPr/>
+        </p:nvSpPr>
+        <p:spPr>
+          <a:xfrm>
+            <a:off x="9717735" y="283464"/>
+            <a:ext cx="45720" cy="45720"/>
+          </a:xfrm>
+          <a:prstGeom prst="rect">
+            <a:avLst/>
+          </a:prstGeom>
+          <a:solidFill>
+            <a:srgbClr val="7E22CE"/>
+          </a:solidFill>
+          <a:ln w="12700">
+            <a:solidFill>
+              <a:srgbClr val="7E22CE"/>
+            </a:solidFill>
+            <a:prstDash val="solid"/>
+          </a:ln>
+        </p:spPr>
+      </p:sp>
+      <p:pic>
+        <p:nvPicPr>
+          <p:cNvPr id="19" name="Image 1" descr="preencoded.png">    </p:cNvPr>
+          <p:cNvPicPr>
+            <a:picLocks noChangeAspect="1"/>
+          </p:cNvPicPr>
+          <p:nvPr/>
+        </p:nvPicPr>
+        <p:blipFill>
+          <a:blip r:embed="rId2"/>
+          <a:stretch>
+            <a:fillRect/>
+          </a:stretch>
+        </p:blipFill>
+        <p:spPr>
+          <a:xfrm>
+            <a:off x="9818319" y="128016"/>
+            <a:ext cx="201168" cy="201168"/>
+          </a:xfrm>
+          <a:prstGeom prst="rect">
+            <a:avLst/>
+          </a:prstGeom>
+        </p:spPr>
+      </p:pic>
+      <p:sp>
+        <p:nvSpPr>
+          <p:cNvPr id="20" name="Text 16"/>
+          <p:cNvSpPr txBox="1"/>
+          <p:nvPr/>
+        </p:nvSpPr>
+        <p:spPr>
+          <a:xfrm>
+            <a:off x="10074351" y="91440"/>
+            <a:ext cx="1532128" cy="274320"/>
+          </a:xfrm>
+          <a:prstGeom prst="rect">
+            <a:avLst/>
+          </a:prstGeom>
+          <a:noFill/>
+          <a:ln/>
+        </p:spPr>
+        <p:txBody>
+          <a:bodyPr wrap="square" lIns="0" tIns="0" rIns="0" bIns="0" rtlCol="0" anchor="ctr"/>
+          <a:lstStyle/>
+          <a:p>
+            <a:pPr indent="0" marL="0">
+              <a:buNone/>
+            </a:pPr>
+            <a:r>
+              <a:rPr lang="en-US" sz="1100" b="1" dirty="0">
+                <a:solidFill>
+                  <a:srgbClr val="6B21A8"/>
+                </a:solidFill>
+                <a:latin typeface="Calibri" pitchFamily="34" charset="0"/>
+                <a:ea typeface="Calibri" pitchFamily="34" charset="-122"/>
+                <a:cs typeface="Calibri" pitchFamily="34" charset="-120"/>
+              </a:rPr>
+              <a:t>UNDERSTAND LATER</a:t>
+            </a:r>
+            <a:endParaRPr lang="en-US" sz="1100" dirty="0"/>
+          </a:p>
+        </p:txBody>
+      </p:sp>
+      <p:sp>
+        <p:nvSpPr>
+          <p:cNvPr id="21" name="Shape 17"/>
+          <p:cNvSpPr/>
+          <p:nvPr/>
+        </p:nvSpPr>
+        <p:spPr>
+          <a:xfrm>
+            <a:off x="8407349" y="91440"/>
+            <a:ext cx="1173226" cy="274320"/>
+          </a:xfrm>
+          <a:prstGeom prst="rect">
+            <a:avLst/>
+          </a:prstGeom>
+          <a:solidFill>
+            <a:srgbClr val="FEF3C7"/>
+          </a:solidFill>
+          <a:ln w="12700">
+            <a:solidFill>
+              <a:srgbClr val="B45309"/>
+            </a:solidFill>
+            <a:prstDash val="solid"/>
+          </a:ln>
+        </p:spPr>
+      </p:sp>
+      <p:sp>
+        <p:nvSpPr>
+          <p:cNvPr id="22" name="Shape 18"/>
+          <p:cNvSpPr/>
+          <p:nvPr/>
+        </p:nvSpPr>
+        <p:spPr>
+          <a:xfrm>
+            <a:off x="8407349" y="91440"/>
+            <a:ext cx="27432" cy="274320"/>
+          </a:xfrm>
+          <a:prstGeom prst="rect">
+            <a:avLst/>
+          </a:prstGeom>
+          <a:solidFill>
+            <a:srgbClr val="B45309"/>
+          </a:solidFill>
+          <a:ln w="12700">
+            <a:solidFill>
+              <a:srgbClr val="B45309"/>
+            </a:solidFill>
+            <a:prstDash val="solid"/>
+          </a:ln>
+        </p:spPr>
+      </p:sp>
+      <p:sp>
+        <p:nvSpPr>
+          <p:cNvPr id="23" name="Shape 19"/>
+          <p:cNvSpPr/>
+          <p:nvPr/>
+        </p:nvSpPr>
+        <p:spPr>
+          <a:xfrm>
+            <a:off x="8462213" y="91440"/>
+            <a:ext cx="27432" cy="274320"/>
+          </a:xfrm>
+          <a:prstGeom prst="rect">
+            <a:avLst/>
+          </a:prstGeom>
+          <a:solidFill>
+            <a:srgbClr val="B45309"/>
+          </a:solidFill>
+          <a:ln w="12700">
+            <a:solidFill>
+              <a:srgbClr val="B45309"/>
+            </a:solidFill>
+            <a:prstDash val="solid"/>
+          </a:ln>
+        </p:spPr>
+      </p:sp>
+      <p:pic>
+        <p:nvPicPr>
+          <p:cNvPr id="24" name="Image 2" descr="preencoded.png">    </p:cNvPr>
+          <p:cNvPicPr>
+            <a:picLocks noChangeAspect="1"/>
+          </p:cNvPicPr>
+          <p:nvPr/>
+        </p:nvPicPr>
+        <p:blipFill>
+          <a:blip r:embed="rId3"/>
+          <a:stretch>
+            <a:fillRect/>
+          </a:stretch>
+        </p:blipFill>
+        <p:spPr>
+          <a:xfrm>
+            <a:off x="8535365" y="128016"/>
+            <a:ext cx="201168" cy="201168"/>
+          </a:xfrm>
+          <a:prstGeom prst="rect">
+            <a:avLst/>
+          </a:prstGeom>
+        </p:spPr>
+      </p:pic>
+      <p:sp>
+        <p:nvSpPr>
+          <p:cNvPr id="25" name="Text 20"/>
+          <p:cNvSpPr txBox="1"/>
+          <p:nvPr/>
+        </p:nvSpPr>
+        <p:spPr>
+          <a:xfrm>
+            <a:off x="8791397" y="91440"/>
+            <a:ext cx="752602" cy="274320"/>
+          </a:xfrm>
+          <a:prstGeom prst="rect">
+            <a:avLst/>
+          </a:prstGeom>
+          <a:noFill/>
+          <a:ln/>
+        </p:spPr>
+        <p:txBody>
+          <a:bodyPr wrap="square" lIns="0" tIns="0" rIns="0" bIns="0" rtlCol="0" anchor="ctr"/>
+          <a:lstStyle/>
+          <a:p>
+            <a:pPr indent="0" marL="0">
+              <a:buNone/>
+            </a:pPr>
+            <a:r>
+              <a:rPr lang="en-US" sz="1100" b="1" dirty="0">
+                <a:solidFill>
+                  <a:srgbClr val="92400E"/>
+                </a:solidFill>
+                <a:latin typeface="Calibri" pitchFamily="34" charset="0"/>
+                <a:ea typeface="Calibri" pitchFamily="34" charset="-122"/>
+                <a:cs typeface="Calibri" pitchFamily="34" charset="-120"/>
+              </a:rPr>
+              <a:t>USE NOW</a:t>
+            </a:r>
+            <a:endParaRPr lang="en-US" sz="1100" dirty="0"/>
+          </a:p>
+        </p:txBody>
+      </p:sp>
+      <p:sp>
+        <p:nvSpPr>
+          <p:cNvPr id="26" name="Shape 21"/>
+          <p:cNvSpPr/>
+          <p:nvPr/>
+        </p:nvSpPr>
+        <p:spPr>
+          <a:xfrm>
+            <a:off x="6518097" y="91440"/>
+            <a:ext cx="1779524" cy="274320"/>
+          </a:xfrm>
+          <a:prstGeom prst="rect">
+            <a:avLst/>
+          </a:prstGeom>
+          <a:solidFill>
+            <a:srgbClr val="E0F2FE"/>
+          </a:solidFill>
+          <a:ln w="12700">
+            <a:solidFill>
+              <a:srgbClr val="0369A1"/>
+            </a:solidFill>
+            <a:prstDash val="solid"/>
+          </a:ln>
+        </p:spPr>
+      </p:sp>
+      <p:sp>
+        <p:nvSpPr>
+          <p:cNvPr id="27" name="Shape 22"/>
+          <p:cNvSpPr/>
+          <p:nvPr/>
+        </p:nvSpPr>
+        <p:spPr>
+          <a:xfrm>
+            <a:off x="6518097" y="91440"/>
+            <a:ext cx="73152" cy="274320"/>
+          </a:xfrm>
+          <a:prstGeom prst="rect">
+            <a:avLst/>
+          </a:prstGeom>
+          <a:solidFill>
+            <a:srgbClr val="0369A1"/>
+          </a:solidFill>
+          <a:ln w="12700">
+            <a:solidFill>
+              <a:srgbClr val="0369A1"/>
+            </a:solidFill>
+            <a:prstDash val="solid"/>
+          </a:ln>
+        </p:spPr>
+      </p:sp>
+      <p:pic>
+        <p:nvPicPr>
+          <p:cNvPr id="28" name="Image 3" descr="preencoded.png">    </p:cNvPr>
+          <p:cNvPicPr>
+            <a:picLocks noChangeAspect="1"/>
+          </p:cNvPicPr>
+          <p:nvPr/>
+        </p:nvPicPr>
+        <p:blipFill>
+          <a:blip r:embed="rId4"/>
+          <a:stretch>
+            <a:fillRect/>
+          </a:stretch>
+        </p:blipFill>
+        <p:spPr>
+          <a:xfrm>
+            <a:off x="6646113" y="128016"/>
+            <a:ext cx="201168" cy="201168"/>
+          </a:xfrm>
+          <a:prstGeom prst="rect">
+            <a:avLst/>
+          </a:prstGeom>
+        </p:spPr>
+      </p:pic>
+      <p:sp>
+        <p:nvSpPr>
+          <p:cNvPr id="29" name="Text 23"/>
+          <p:cNvSpPr txBox="1"/>
+          <p:nvPr/>
+        </p:nvSpPr>
+        <p:spPr>
+          <a:xfrm>
+            <a:off x="6902145" y="91440"/>
+            <a:ext cx="1358900" cy="274320"/>
+          </a:xfrm>
+          <a:prstGeom prst="rect">
+            <a:avLst/>
+          </a:prstGeom>
+          <a:noFill/>
+          <a:ln/>
+        </p:spPr>
+        <p:txBody>
+          <a:bodyPr wrap="square" lIns="0" tIns="0" rIns="0" bIns="0" rtlCol="0" anchor="ctr"/>
+          <a:lstStyle/>
+          <a:p>
+            <a:pPr indent="0" marL="0">
+              <a:buNone/>
+            </a:pPr>
+            <a:r>
+              <a:rPr lang="en-US" sz="1100" b="1" dirty="0">
+                <a:solidFill>
+                  <a:srgbClr val="075985"/>
+                </a:solidFill>
+                <a:latin typeface="Calibri" pitchFamily="34" charset="0"/>
+                <a:ea typeface="Calibri" pitchFamily="34" charset="-122"/>
+                <a:cs typeface="Calibri" pitchFamily="34" charset="-120"/>
+              </a:rPr>
+              <a:t>UNDERSTAND NOW</a:t>
+            </a:r>
+            <a:endParaRPr lang="en-US" sz="1100" dirty="0"/>
+          </a:p>
+        </p:txBody>
+      </p:sp>
+      <p:sp>
+        <p:nvSpPr>
           <p:cNvPr id="25" name="Slide Number Placeholder 0"/>
           <p:cNvSpPr>
             <a:spLocks noGrp="1"/>
@@ -6835,6 +7268,158 @@
       </p:sp>
       <p:sp>
         <p:nvSpPr>
+          <p:cNvPr id="17" name="Shape 15"/>
+          <p:cNvSpPr/>
+          <p:nvPr/>
+        </p:nvSpPr>
+        <p:spPr>
+          <a:xfrm>
+            <a:off x="8762695" y="91440"/>
+            <a:ext cx="2880360" cy="274320"/>
+          </a:xfrm>
+          <a:prstGeom prst="rect">
+            <a:avLst/>
+          </a:prstGeom>
+          <a:solidFill>
+            <a:srgbClr val="FEF3C7"/>
+          </a:solidFill>
+          <a:ln w="12700">
+            <a:solidFill>
+              <a:srgbClr val="B45309"/>
+            </a:solidFill>
+            <a:prstDash val="solid"/>
+          </a:ln>
+        </p:spPr>
+      </p:sp>
+      <p:sp>
+        <p:nvSpPr>
+          <p:cNvPr id="18" name="Shape 16"/>
+          <p:cNvSpPr/>
+          <p:nvPr/>
+        </p:nvSpPr>
+        <p:spPr>
+          <a:xfrm>
+            <a:off x="8762695" y="91440"/>
+            <a:ext cx="27432" cy="274320"/>
+          </a:xfrm>
+          <a:prstGeom prst="rect">
+            <a:avLst/>
+          </a:prstGeom>
+          <a:solidFill>
+            <a:srgbClr val="B45309"/>
+          </a:solidFill>
+          <a:ln w="12700">
+            <a:solidFill>
+              <a:srgbClr val="B45309"/>
+            </a:solidFill>
+            <a:prstDash val="solid"/>
+          </a:ln>
+        </p:spPr>
+      </p:sp>
+      <p:sp>
+        <p:nvSpPr>
+          <p:cNvPr id="19" name="Shape 17"/>
+          <p:cNvSpPr/>
+          <p:nvPr/>
+        </p:nvSpPr>
+        <p:spPr>
+          <a:xfrm>
+            <a:off x="8817559" y="91440"/>
+            <a:ext cx="27432" cy="274320"/>
+          </a:xfrm>
+          <a:prstGeom prst="rect">
+            <a:avLst/>
+          </a:prstGeom>
+          <a:solidFill>
+            <a:srgbClr val="B45309"/>
+          </a:solidFill>
+          <a:ln w="12700">
+            <a:solidFill>
+              <a:srgbClr val="B45309"/>
+            </a:solidFill>
+            <a:prstDash val="solid"/>
+          </a:ln>
+        </p:spPr>
+      </p:sp>
+      <p:pic>
+        <p:nvPicPr>
+          <p:cNvPr id="20" name="Image 0" descr="preencoded.png">    </p:cNvPr>
+          <p:cNvPicPr>
+            <a:picLocks noChangeAspect="1"/>
+          </p:cNvPicPr>
+          <p:nvPr/>
+        </p:nvPicPr>
+        <p:blipFill>
+          <a:blip r:embed="rId1"/>
+          <a:stretch>
+            <a:fillRect/>
+          </a:stretch>
+        </p:blipFill>
+        <p:spPr>
+          <a:xfrm>
+            <a:off x="8890711" y="128016"/>
+            <a:ext cx="201168" cy="201168"/>
+          </a:xfrm>
+          <a:prstGeom prst="rect">
+            <a:avLst/>
+          </a:prstGeom>
+        </p:spPr>
+      </p:pic>
+      <p:sp>
+        <p:nvSpPr>
+          <p:cNvPr id="21" name="Text 18"/>
+          <p:cNvSpPr txBox="1"/>
+          <p:nvPr/>
+        </p:nvSpPr>
+        <p:spPr>
+          <a:xfrm>
+            <a:off x="9146743" y="91440"/>
+            <a:ext cx="2459736" cy="274320"/>
+          </a:xfrm>
+          <a:prstGeom prst="rect">
+            <a:avLst/>
+          </a:prstGeom>
+          <a:noFill/>
+          <a:ln/>
+        </p:spPr>
+        <p:txBody>
+          <a:bodyPr wrap="square" lIns="0" tIns="0" rIns="0" bIns="0" rtlCol="0" anchor="ctr"/>
+          <a:lstStyle/>
+          <a:p>
+            <a:pPr indent="0" marL="0">
+              <a:buNone/>
+            </a:pPr>
+            <a:r>
+              <a:rPr lang="en-US" sz="1100" b="1" dirty="0">
+                <a:solidFill>
+                  <a:srgbClr val="92400E"/>
+                </a:solidFill>
+                <a:latin typeface="Calibri" pitchFamily="34" charset="0"/>
+                <a:ea typeface="Calibri" pitchFamily="34" charset="-122"/>
+                <a:cs typeface="Calibri" pitchFamily="34" charset="-120"/>
+              </a:rPr>
+              <a:t>USE NOW</a:t>
+            </a:r>
+            <a:pPr indent="0" marL="0">
+              <a:buNone/>
+            </a:pPr>
+            <a:r>
+              <a:rPr lang="en-US" sz="1100" dirty="0">
+                <a:solidFill>
+                  <a:srgbClr val="92400E"/>
+                </a:solidFill>
+                <a:latin typeface="Calibri" pitchFamily="34" charset="0"/>
+                <a:ea typeface="Calibri" pitchFamily="34" charset="-122"/>
+                <a:cs typeface="Calibri" pitchFamily="34" charset="-120"/>
+              </a:rPr>
+              <a:t> · the PRG32 runtime calls</a:t>
+            </a:r>
+            <a:endParaRPr lang="en-US" sz="1100" dirty="0"/>
+          </a:p>
+        </p:txBody>
+      </p:sp>
+      <p:sp>
+        <p:nvSpPr>
           <p:cNvPr id="25" name="Slide Number Placeholder 0"/>
           <p:cNvSpPr>
             <a:spLocks noGrp="1"/>
@@ -7795,6 +8380,133 @@
       </p:sp>
       <p:sp>
         <p:nvSpPr>
+          <p:cNvPr id="17" name="Shape 15"/>
+          <p:cNvSpPr/>
+          <p:nvPr/>
+        </p:nvSpPr>
+        <p:spPr>
+          <a:xfrm>
+            <a:off x="8222056" y="91440"/>
+            <a:ext cx="3420999" cy="274320"/>
+          </a:xfrm>
+          <a:prstGeom prst="rect">
+            <a:avLst/>
+          </a:prstGeom>
+          <a:solidFill>
+            <a:srgbClr val="E0F2FE"/>
+          </a:solidFill>
+          <a:ln w="12700">
+            <a:solidFill>
+              <a:srgbClr val="0369A1"/>
+            </a:solidFill>
+            <a:prstDash val="solid"/>
+          </a:ln>
+        </p:spPr>
+      </p:sp>
+      <p:sp>
+        <p:nvSpPr>
+          <p:cNvPr id="18" name="Shape 16"/>
+          <p:cNvSpPr/>
+          <p:nvPr/>
+        </p:nvSpPr>
+        <p:spPr>
+          <a:xfrm>
+            <a:off x="8222056" y="91440"/>
+            <a:ext cx="73152" cy="274320"/>
+          </a:xfrm>
+          <a:prstGeom prst="rect">
+            <a:avLst/>
+          </a:prstGeom>
+          <a:solidFill>
+            <a:srgbClr val="0369A1"/>
+          </a:solidFill>
+          <a:ln w="12700">
+            <a:solidFill>
+              <a:srgbClr val="0369A1"/>
+            </a:solidFill>
+            <a:prstDash val="solid"/>
+          </a:ln>
+        </p:spPr>
+      </p:sp>
+      <p:pic>
+        <p:nvPicPr>
+          <p:cNvPr id="19" name="Image 0" descr="preencoded.png">    </p:cNvPr>
+          <p:cNvPicPr>
+            <a:picLocks noChangeAspect="1"/>
+          </p:cNvPicPr>
+          <p:nvPr/>
+        </p:nvPicPr>
+        <p:blipFill>
+          <a:blip r:embed="rId1"/>
+          <a:stretch>
+            <a:fillRect/>
+          </a:stretch>
+        </p:blipFill>
+        <p:spPr>
+          <a:xfrm>
+            <a:off x="8350072" y="128016"/>
+            <a:ext cx="201168" cy="201168"/>
+          </a:xfrm>
+          <a:prstGeom prst="rect">
+            <a:avLst/>
+          </a:prstGeom>
+        </p:spPr>
+      </p:pic>
+      <p:sp>
+        <p:nvSpPr>
+          <p:cNvPr id="20" name="Text 17"/>
+          <p:cNvSpPr txBox="1"/>
+          <p:nvPr/>
+        </p:nvSpPr>
+        <p:spPr>
+          <a:xfrm>
+            <a:off x="8606104" y="91440"/>
+            <a:ext cx="3000375" cy="274320"/>
+          </a:xfrm>
+          <a:prstGeom prst="rect">
+            <a:avLst/>
+          </a:prstGeom>
+          <a:noFill/>
+          <a:ln/>
+        </p:spPr>
+        <p:txBody>
+          <a:bodyPr wrap="square" lIns="0" tIns="0" rIns="0" bIns="0" rtlCol="0" anchor="ctr"/>
+          <a:lstStyle/>
+          <a:p>
+            <a:pPr indent="0" marL="0">
+              <a:buNone/>
+            </a:pPr>
+            <a:r>
+              <a:rPr lang="en-US" sz="1100" b="1" dirty="0">
+                <a:solidFill>
+                  <a:srgbClr val="075985"/>
+                </a:solidFill>
+                <a:latin typeface="Calibri" pitchFamily="34" charset="0"/>
+                <a:ea typeface="Calibri" pitchFamily="34" charset="-122"/>
+                <a:cs typeface="Calibri" pitchFamily="34" charset="-120"/>
+              </a:rPr>
+              <a:t>UNDERSTAND NOW</a:t>
+            </a:r>
+            <a:pPr indent="0" marL="0">
+              <a:buNone/>
+            </a:pPr>
+            <a:r>
+              <a:rPr lang="en-US" sz="1100" dirty="0">
+                <a:solidFill>
+                  <a:srgbClr val="075985"/>
+                </a:solidFill>
+                <a:latin typeface="Calibri" pitchFamily="34" charset="0"/>
+                <a:ea typeface="Calibri" pitchFamily="34" charset="-122"/>
+                <a:cs typeface="Calibri" pitchFamily="34" charset="-120"/>
+              </a:rPr>
+              <a:t> · comparators and parity</a:t>
+            </a:r>
+            <a:endParaRPr lang="en-US" sz="1100" dirty="0"/>
+          </a:p>
+        </p:txBody>
+      </p:sp>
+      <p:sp>
+        <p:nvSpPr>
           <p:cNvPr id="25" name="Slide Number Placeholder 0"/>
           <p:cNvSpPr>
             <a:spLocks noGrp="1"/>
@@ -8571,6 +9283,158 @@
       </p:sp>
       <p:sp>
         <p:nvSpPr>
+          <p:cNvPr id="14" name="Shape 12"/>
+          <p:cNvSpPr/>
+          <p:nvPr/>
+        </p:nvSpPr>
+        <p:spPr>
+          <a:xfrm>
+            <a:off x="8762695" y="91440"/>
+            <a:ext cx="2880360" cy="274320"/>
+          </a:xfrm>
+          <a:prstGeom prst="rect">
+            <a:avLst/>
+          </a:prstGeom>
+          <a:solidFill>
+            <a:srgbClr val="FEF3C7"/>
+          </a:solidFill>
+          <a:ln w="12700">
+            <a:solidFill>
+              <a:srgbClr val="B45309"/>
+            </a:solidFill>
+            <a:prstDash val="solid"/>
+          </a:ln>
+        </p:spPr>
+      </p:sp>
+      <p:sp>
+        <p:nvSpPr>
+          <p:cNvPr id="15" name="Shape 13"/>
+          <p:cNvSpPr/>
+          <p:nvPr/>
+        </p:nvSpPr>
+        <p:spPr>
+          <a:xfrm>
+            <a:off x="8762695" y="91440"/>
+            <a:ext cx="27432" cy="274320"/>
+          </a:xfrm>
+          <a:prstGeom prst="rect">
+            <a:avLst/>
+          </a:prstGeom>
+          <a:solidFill>
+            <a:srgbClr val="B45309"/>
+          </a:solidFill>
+          <a:ln w="12700">
+            <a:solidFill>
+              <a:srgbClr val="B45309"/>
+            </a:solidFill>
+            <a:prstDash val="solid"/>
+          </a:ln>
+        </p:spPr>
+      </p:sp>
+      <p:sp>
+        <p:nvSpPr>
+          <p:cNvPr id="16" name="Shape 14"/>
+          <p:cNvSpPr/>
+          <p:nvPr/>
+        </p:nvSpPr>
+        <p:spPr>
+          <a:xfrm>
+            <a:off x="8817559" y="91440"/>
+            <a:ext cx="27432" cy="274320"/>
+          </a:xfrm>
+          <a:prstGeom prst="rect">
+            <a:avLst/>
+          </a:prstGeom>
+          <a:solidFill>
+            <a:srgbClr val="B45309"/>
+          </a:solidFill>
+          <a:ln w="12700">
+            <a:solidFill>
+              <a:srgbClr val="B45309"/>
+            </a:solidFill>
+            <a:prstDash val="solid"/>
+          </a:ln>
+        </p:spPr>
+      </p:sp>
+      <p:pic>
+        <p:nvPicPr>
+          <p:cNvPr id="17" name="Image 0" descr="preencoded.png">    </p:cNvPr>
+          <p:cNvPicPr>
+            <a:picLocks noChangeAspect="1"/>
+          </p:cNvPicPr>
+          <p:nvPr/>
+        </p:nvPicPr>
+        <p:blipFill>
+          <a:blip r:embed="rId1"/>
+          <a:stretch>
+            <a:fillRect/>
+          </a:stretch>
+        </p:blipFill>
+        <p:spPr>
+          <a:xfrm>
+            <a:off x="8890711" y="128016"/>
+            <a:ext cx="201168" cy="201168"/>
+          </a:xfrm>
+          <a:prstGeom prst="rect">
+            <a:avLst/>
+          </a:prstGeom>
+        </p:spPr>
+      </p:pic>
+      <p:sp>
+        <p:nvSpPr>
+          <p:cNvPr id="18" name="Text 15"/>
+          <p:cNvSpPr txBox="1"/>
+          <p:nvPr/>
+        </p:nvSpPr>
+        <p:spPr>
+          <a:xfrm>
+            <a:off x="9146743" y="91440"/>
+            <a:ext cx="2459736" cy="274320"/>
+          </a:xfrm>
+          <a:prstGeom prst="rect">
+            <a:avLst/>
+          </a:prstGeom>
+          <a:noFill/>
+          <a:ln/>
+        </p:spPr>
+        <p:txBody>
+          <a:bodyPr wrap="square" lIns="0" tIns="0" rIns="0" bIns="0" rtlCol="0" anchor="ctr"/>
+          <a:lstStyle/>
+          <a:p>
+            <a:pPr indent="0" marL="0">
+              <a:buNone/>
+            </a:pPr>
+            <a:r>
+              <a:rPr lang="en-US" sz="1100" b="1" dirty="0">
+                <a:solidFill>
+                  <a:srgbClr val="92400E"/>
+                </a:solidFill>
+                <a:latin typeface="Calibri" pitchFamily="34" charset="0"/>
+                <a:ea typeface="Calibri" pitchFamily="34" charset="-122"/>
+                <a:cs typeface="Calibri" pitchFamily="34" charset="-120"/>
+              </a:rPr>
+              <a:t>USE NOW</a:t>
+            </a:r>
+            <a:pPr indent="0" marL="0">
+              <a:buNone/>
+            </a:pPr>
+            <a:r>
+              <a:rPr lang="en-US" sz="1100" dirty="0">
+                <a:solidFill>
+                  <a:srgbClr val="92400E"/>
+                </a:solidFill>
+                <a:latin typeface="Calibri" pitchFamily="34" charset="0"/>
+                <a:ea typeface="Calibri" pitchFamily="34" charset="-122"/>
+                <a:cs typeface="Calibri" pitchFamily="34" charset="-120"/>
+              </a:rPr>
+              <a:t> · the PRG32 runtime calls</a:t>
+            </a:r>
+            <a:endParaRPr lang="en-US" sz="1100" dirty="0"/>
+          </a:p>
+        </p:txBody>
+      </p:sp>
+      <p:sp>
+        <p:nvSpPr>
           <p:cNvPr id="25" name="Slide Number Placeholder 0"/>
           <p:cNvSpPr>
             <a:spLocks noGrp="1"/>
@@ -9656,6 +10520,172 @@
       </p:sp>
       <p:sp>
         <p:nvSpPr>
+          <p:cNvPr id="17" name="Shape 15"/>
+          <p:cNvSpPr/>
+          <p:nvPr/>
+        </p:nvSpPr>
+        <p:spPr>
+          <a:xfrm>
+            <a:off x="7865821" y="91440"/>
+            <a:ext cx="3777234" cy="274320"/>
+          </a:xfrm>
+          <a:prstGeom prst="rect">
+            <a:avLst/>
+          </a:prstGeom>
+          <a:solidFill>
+            <a:srgbClr val="FEF3C7"/>
+          </a:solidFill>
+          <a:ln w="12700">
+            <a:solidFill>
+              <a:srgbClr val="B45309"/>
+            </a:solidFill>
+            <a:prstDash val="solid"/>
+          </a:ln>
+        </p:spPr>
+      </p:sp>
+      <p:sp>
+        <p:nvSpPr>
+          <p:cNvPr id="18" name="Shape 16"/>
+          <p:cNvSpPr/>
+          <p:nvPr/>
+        </p:nvSpPr>
+        <p:spPr>
+          <a:xfrm>
+            <a:off x="7865821" y="91440"/>
+            <a:ext cx="27432" cy="274320"/>
+          </a:xfrm>
+          <a:prstGeom prst="rect">
+            <a:avLst/>
+          </a:prstGeom>
+          <a:solidFill>
+            <a:srgbClr val="B45309"/>
+          </a:solidFill>
+          <a:ln w="12700">
+            <a:solidFill>
+              <a:srgbClr val="B45309"/>
+            </a:solidFill>
+            <a:prstDash val="solid"/>
+          </a:ln>
+        </p:spPr>
+      </p:sp>
+      <p:sp>
+        <p:nvSpPr>
+          <p:cNvPr id="19" name="Shape 17"/>
+          <p:cNvSpPr/>
+          <p:nvPr/>
+        </p:nvSpPr>
+        <p:spPr>
+          <a:xfrm>
+            <a:off x="7920685" y="91440"/>
+            <a:ext cx="27432" cy="274320"/>
+          </a:xfrm>
+          <a:prstGeom prst="rect">
+            <a:avLst/>
+          </a:prstGeom>
+          <a:solidFill>
+            <a:srgbClr val="B45309"/>
+          </a:solidFill>
+          <a:ln w="12700">
+            <a:solidFill>
+              <a:srgbClr val="B45309"/>
+            </a:solidFill>
+            <a:prstDash val="solid"/>
+          </a:ln>
+        </p:spPr>
+      </p:sp>
+      <p:pic>
+        <p:nvPicPr>
+          <p:cNvPr id="20" name="Image 0" descr="preencoded.png">    </p:cNvPr>
+          <p:cNvPicPr>
+            <a:picLocks noChangeAspect="1"/>
+          </p:cNvPicPr>
+          <p:nvPr/>
+        </p:nvPicPr>
+        <p:blipFill>
+          <a:blip r:embed="rId1"/>
+          <a:stretch>
+            <a:fillRect/>
+          </a:stretch>
+        </p:blipFill>
+        <p:spPr>
+          <a:xfrm>
+            <a:off x="7993837" y="128016"/>
+            <a:ext cx="201168" cy="201168"/>
+          </a:xfrm>
+          <a:prstGeom prst="rect">
+            <a:avLst/>
+          </a:prstGeom>
+        </p:spPr>
+      </p:pic>
+      <p:sp>
+        <p:nvSpPr>
+          <p:cNvPr id="21" name="Text 18"/>
+          <p:cNvSpPr txBox="1"/>
+          <p:nvPr/>
+        </p:nvSpPr>
+        <p:spPr>
+          <a:xfrm>
+            <a:off x="8249869" y="91440"/>
+            <a:ext cx="3356610" cy="274320"/>
+          </a:xfrm>
+          <a:prstGeom prst="rect">
+            <a:avLst/>
+          </a:prstGeom>
+          <a:noFill/>
+          <a:ln/>
+        </p:spPr>
+        <p:txBody>
+          <a:bodyPr wrap="square" lIns="0" tIns="0" rIns="0" bIns="0" rtlCol="0" anchor="ctr"/>
+          <a:lstStyle/>
+          <a:p>
+            <a:pPr indent="0" marL="0">
+              <a:buNone/>
+            </a:pPr>
+            <a:r>
+              <a:rPr lang="en-US" sz="1100" b="1" dirty="0">
+                <a:solidFill>
+                  <a:srgbClr val="92400E"/>
+                </a:solidFill>
+                <a:latin typeface="Calibri" pitchFamily="34" charset="0"/>
+                <a:ea typeface="Calibri" pitchFamily="34" charset="-122"/>
+                <a:cs typeface="Calibri" pitchFamily="34" charset="-120"/>
+              </a:rPr>
+              <a:t>USE NOW</a:t>
+            </a:r>
+            <a:pPr indent="0" marL="0">
+              <a:buNone/>
+            </a:pPr>
+            <a:r>
+              <a:rPr lang="en-US" sz="1100" dirty="0">
+                <a:solidFill>
+                  <a:srgbClr val="92400E"/>
+                </a:solidFill>
+                <a:latin typeface="Calibri" pitchFamily="34" charset="0"/>
+                <a:ea typeface="Calibri" pitchFamily="34" charset="-122"/>
+                <a:cs typeface="Calibri" pitchFamily="34" charset="-120"/>
+              </a:rPr>
+              <a:t> · the calling convention</a:t>
+            </a:r>
+            <a:pPr indent="0" marL="0">
+              <a:buNone/>
+            </a:pPr>
+            <a:r>
+              <a:rPr lang="en-US" sz="1100" b="1" dirty="0">
+                <a:solidFill>
+                  <a:srgbClr val="92400E"/>
+                </a:solidFill>
+                <a:latin typeface="Calibri" pitchFamily="34" charset="0"/>
+                <a:ea typeface="Calibri" pitchFamily="34" charset="-122"/>
+                <a:cs typeface="Calibri" pitchFamily="34" charset="-120"/>
+              </a:rPr>
+              <a:t> → Lecture 18</a:t>
+            </a:r>
+            <a:endParaRPr lang="en-US" sz="1100" dirty="0"/>
+          </a:p>
+        </p:txBody>
+      </p:sp>
+      <p:sp>
+        <p:nvSpPr>
           <p:cNvPr id="25" name="Slide Number Placeholder 0"/>
           <p:cNvSpPr>
             <a:spLocks noGrp="1"/>
@@ -10430,6 +11460,133 @@
       </p:sp>
       <p:sp>
         <p:nvSpPr>
+          <p:cNvPr id="14" name="Shape 12"/>
+          <p:cNvSpPr/>
+          <p:nvPr/>
+        </p:nvSpPr>
+        <p:spPr>
+          <a:xfrm>
+            <a:off x="8287715" y="91440"/>
+            <a:ext cx="3355340" cy="274320"/>
+          </a:xfrm>
+          <a:prstGeom prst="rect">
+            <a:avLst/>
+          </a:prstGeom>
+          <a:solidFill>
+            <a:srgbClr val="E0F2FE"/>
+          </a:solidFill>
+          <a:ln w="12700">
+            <a:solidFill>
+              <a:srgbClr val="0369A1"/>
+            </a:solidFill>
+            <a:prstDash val="solid"/>
+          </a:ln>
+        </p:spPr>
+      </p:sp>
+      <p:sp>
+        <p:nvSpPr>
+          <p:cNvPr id="15" name="Shape 13"/>
+          <p:cNvSpPr/>
+          <p:nvPr/>
+        </p:nvSpPr>
+        <p:spPr>
+          <a:xfrm>
+            <a:off x="8287715" y="91440"/>
+            <a:ext cx="73152" cy="274320"/>
+          </a:xfrm>
+          <a:prstGeom prst="rect">
+            <a:avLst/>
+          </a:prstGeom>
+          <a:solidFill>
+            <a:srgbClr val="0369A1"/>
+          </a:solidFill>
+          <a:ln w="12700">
+            <a:solidFill>
+              <a:srgbClr val="0369A1"/>
+            </a:solidFill>
+            <a:prstDash val="solid"/>
+          </a:ln>
+        </p:spPr>
+      </p:sp>
+      <p:pic>
+        <p:nvPicPr>
+          <p:cNvPr id="16" name="Image 0" descr="preencoded.png">    </p:cNvPr>
+          <p:cNvPicPr>
+            <a:picLocks noChangeAspect="1"/>
+          </p:cNvPicPr>
+          <p:nvPr/>
+        </p:nvPicPr>
+        <p:blipFill>
+          <a:blip r:embed="rId1"/>
+          <a:stretch>
+            <a:fillRect/>
+          </a:stretch>
+        </p:blipFill>
+        <p:spPr>
+          <a:xfrm>
+            <a:off x="8415731" y="128016"/>
+            <a:ext cx="201168" cy="201168"/>
+          </a:xfrm>
+          <a:prstGeom prst="rect">
+            <a:avLst/>
+          </a:prstGeom>
+        </p:spPr>
+      </p:pic>
+      <p:sp>
+        <p:nvSpPr>
+          <p:cNvPr id="17" name="Text 14"/>
+          <p:cNvSpPr txBox="1"/>
+          <p:nvPr/>
+        </p:nvSpPr>
+        <p:spPr>
+          <a:xfrm>
+            <a:off x="8671763" y="91440"/>
+            <a:ext cx="2934716" cy="274320"/>
+          </a:xfrm>
+          <a:prstGeom prst="rect">
+            <a:avLst/>
+          </a:prstGeom>
+          <a:noFill/>
+          <a:ln/>
+        </p:spPr>
+        <p:txBody>
+          <a:bodyPr wrap="square" lIns="0" tIns="0" rIns="0" bIns="0" rtlCol="0" anchor="ctr"/>
+          <a:lstStyle/>
+          <a:p>
+            <a:pPr indent="0" marL="0">
+              <a:buNone/>
+            </a:pPr>
+            <a:r>
+              <a:rPr lang="en-US" sz="1100" b="1" dirty="0">
+                <a:solidFill>
+                  <a:srgbClr val="075985"/>
+                </a:solidFill>
+                <a:latin typeface="Calibri" pitchFamily="34" charset="0"/>
+                <a:ea typeface="Calibri" pitchFamily="34" charset="-122"/>
+                <a:cs typeface="Calibri" pitchFamily="34" charset="-120"/>
+              </a:rPr>
+              <a:t>UNDERSTAND NOW</a:t>
+            </a:r>
+            <a:pPr indent="0" marL="0">
+              <a:buNone/>
+            </a:pPr>
+            <a:r>
+              <a:rPr lang="en-US" sz="1100" dirty="0">
+                <a:solidFill>
+                  <a:srgbClr val="075985"/>
+                </a:solidFill>
+                <a:latin typeface="Calibri" pitchFamily="34" charset="0"/>
+                <a:ea typeface="Calibri" pitchFamily="34" charset="-122"/>
+                <a:cs typeface="Calibri" pitchFamily="34" charset="-120"/>
+              </a:rPr>
+              <a:t> · arguments in a0 to a7</a:t>
+            </a:r>
+            <a:endParaRPr lang="en-US" sz="1100" dirty="0"/>
+          </a:p>
+        </p:txBody>
+      </p:sp>
+      <p:sp>
+        <p:nvSpPr>
           <p:cNvPr id="25" name="Slide Number Placeholder 0"/>
           <p:cNvSpPr>
             <a:spLocks noGrp="1"/>
@@ -11209,6 +12366,133 @@
       </p:sp>
       <p:sp>
         <p:nvSpPr>
+          <p:cNvPr id="14" name="Shape 12"/>
+          <p:cNvSpPr/>
+          <p:nvPr/>
+        </p:nvSpPr>
+        <p:spPr>
+          <a:xfrm>
+            <a:off x="8287715" y="91440"/>
+            <a:ext cx="3355340" cy="274320"/>
+          </a:xfrm>
+          <a:prstGeom prst="rect">
+            <a:avLst/>
+          </a:prstGeom>
+          <a:solidFill>
+            <a:srgbClr val="E0F2FE"/>
+          </a:solidFill>
+          <a:ln w="12700">
+            <a:solidFill>
+              <a:srgbClr val="0369A1"/>
+            </a:solidFill>
+            <a:prstDash val="solid"/>
+          </a:ln>
+        </p:spPr>
+      </p:sp>
+      <p:sp>
+        <p:nvSpPr>
+          <p:cNvPr id="15" name="Shape 13"/>
+          <p:cNvSpPr/>
+          <p:nvPr/>
+        </p:nvSpPr>
+        <p:spPr>
+          <a:xfrm>
+            <a:off x="8287715" y="91440"/>
+            <a:ext cx="73152" cy="274320"/>
+          </a:xfrm>
+          <a:prstGeom prst="rect">
+            <a:avLst/>
+          </a:prstGeom>
+          <a:solidFill>
+            <a:srgbClr val="0369A1"/>
+          </a:solidFill>
+          <a:ln w="12700">
+            <a:solidFill>
+              <a:srgbClr val="0369A1"/>
+            </a:solidFill>
+            <a:prstDash val="solid"/>
+          </a:ln>
+        </p:spPr>
+      </p:sp>
+      <p:pic>
+        <p:nvPicPr>
+          <p:cNvPr id="16" name="Image 0" descr="preencoded.png">    </p:cNvPr>
+          <p:cNvPicPr>
+            <a:picLocks noChangeAspect="1"/>
+          </p:cNvPicPr>
+          <p:nvPr/>
+        </p:nvPicPr>
+        <p:blipFill>
+          <a:blip r:embed="rId1"/>
+          <a:stretch>
+            <a:fillRect/>
+          </a:stretch>
+        </p:blipFill>
+        <p:spPr>
+          <a:xfrm>
+            <a:off x="8415731" y="128016"/>
+            <a:ext cx="201168" cy="201168"/>
+          </a:xfrm>
+          <a:prstGeom prst="rect">
+            <a:avLst/>
+          </a:prstGeom>
+        </p:spPr>
+      </p:pic>
+      <p:sp>
+        <p:nvSpPr>
+          <p:cNvPr id="17" name="Text 14"/>
+          <p:cNvSpPr txBox="1"/>
+          <p:nvPr/>
+        </p:nvSpPr>
+        <p:spPr>
+          <a:xfrm>
+            <a:off x="8671763" y="91440"/>
+            <a:ext cx="2934716" cy="274320"/>
+          </a:xfrm>
+          <a:prstGeom prst="rect">
+            <a:avLst/>
+          </a:prstGeom>
+          <a:noFill/>
+          <a:ln/>
+        </p:spPr>
+        <p:txBody>
+          <a:bodyPr wrap="square" lIns="0" tIns="0" rIns="0" bIns="0" rtlCol="0" anchor="ctr"/>
+          <a:lstStyle/>
+          <a:p>
+            <a:pPr indent="0" marL="0">
+              <a:buNone/>
+            </a:pPr>
+            <a:r>
+              <a:rPr lang="en-US" sz="1100" b="1" dirty="0">
+                <a:solidFill>
+                  <a:srgbClr val="075985"/>
+                </a:solidFill>
+                <a:latin typeface="Calibri" pitchFamily="34" charset="0"/>
+                <a:ea typeface="Calibri" pitchFamily="34" charset="-122"/>
+                <a:cs typeface="Calibri" pitchFamily="34" charset="-120"/>
+              </a:rPr>
+              <a:t>UNDERSTAND NOW</a:t>
+            </a:r>
+            <a:pPr indent="0" marL="0">
+              <a:buNone/>
+            </a:pPr>
+            <a:r>
+              <a:rPr lang="en-US" sz="1100" dirty="0">
+                <a:solidFill>
+                  <a:srgbClr val="075985"/>
+                </a:solidFill>
+                <a:latin typeface="Calibri" pitchFamily="34" charset="0"/>
+                <a:ea typeface="Calibri" pitchFamily="34" charset="-122"/>
+                <a:cs typeface="Calibri" pitchFamily="34" charset="-120"/>
+              </a:rPr>
+              <a:t> · arguments in a0 to a7</a:t>
+            </a:r>
+            <a:endParaRPr lang="en-US" sz="1100" dirty="0"/>
+          </a:p>
+        </p:txBody>
+      </p:sp>
+      <p:sp>
+        <p:nvSpPr>
           <p:cNvPr id="25" name="Slide Number Placeholder 0"/>
           <p:cNvSpPr>
             <a:spLocks noGrp="1"/>
@@ -13164,6 +14448,158 @@
       </p:sp>
       <p:sp>
         <p:nvSpPr>
+          <p:cNvPr id="17" name="Shape 15"/>
+          <p:cNvSpPr/>
+          <p:nvPr/>
+        </p:nvSpPr>
+        <p:spPr>
+          <a:xfrm>
+            <a:off x="9287967" y="91440"/>
+            <a:ext cx="2355088" cy="274320"/>
+          </a:xfrm>
+          <a:prstGeom prst="rect">
+            <a:avLst/>
+          </a:prstGeom>
+          <a:solidFill>
+            <a:srgbClr val="FEF3C7"/>
+          </a:solidFill>
+          <a:ln w="12700">
+            <a:solidFill>
+              <a:srgbClr val="B45309"/>
+            </a:solidFill>
+            <a:prstDash val="solid"/>
+          </a:ln>
+        </p:spPr>
+      </p:sp>
+      <p:sp>
+        <p:nvSpPr>
+          <p:cNvPr id="18" name="Shape 16"/>
+          <p:cNvSpPr/>
+          <p:nvPr/>
+        </p:nvSpPr>
+        <p:spPr>
+          <a:xfrm>
+            <a:off x="9287967" y="91440"/>
+            <a:ext cx="27432" cy="274320"/>
+          </a:xfrm>
+          <a:prstGeom prst="rect">
+            <a:avLst/>
+          </a:prstGeom>
+          <a:solidFill>
+            <a:srgbClr val="B45309"/>
+          </a:solidFill>
+          <a:ln w="12700">
+            <a:solidFill>
+              <a:srgbClr val="B45309"/>
+            </a:solidFill>
+            <a:prstDash val="solid"/>
+          </a:ln>
+        </p:spPr>
+      </p:sp>
+      <p:sp>
+        <p:nvSpPr>
+          <p:cNvPr id="19" name="Shape 17"/>
+          <p:cNvSpPr/>
+          <p:nvPr/>
+        </p:nvSpPr>
+        <p:spPr>
+          <a:xfrm>
+            <a:off x="9342831" y="91440"/>
+            <a:ext cx="27432" cy="274320"/>
+          </a:xfrm>
+          <a:prstGeom prst="rect">
+            <a:avLst/>
+          </a:prstGeom>
+          <a:solidFill>
+            <a:srgbClr val="B45309"/>
+          </a:solidFill>
+          <a:ln w="12700">
+            <a:solidFill>
+              <a:srgbClr val="B45309"/>
+            </a:solidFill>
+            <a:prstDash val="solid"/>
+          </a:ln>
+        </p:spPr>
+      </p:sp>
+      <p:pic>
+        <p:nvPicPr>
+          <p:cNvPr id="20" name="Image 0" descr="preencoded.png">    </p:cNvPr>
+          <p:cNvPicPr>
+            <a:picLocks noChangeAspect="1"/>
+          </p:cNvPicPr>
+          <p:nvPr/>
+        </p:nvPicPr>
+        <p:blipFill>
+          <a:blip r:embed="rId1"/>
+          <a:stretch>
+            <a:fillRect/>
+          </a:stretch>
+        </p:blipFill>
+        <p:spPr>
+          <a:xfrm>
+            <a:off x="9415983" y="128016"/>
+            <a:ext cx="201168" cy="201168"/>
+          </a:xfrm>
+          <a:prstGeom prst="rect">
+            <a:avLst/>
+          </a:prstGeom>
+        </p:spPr>
+      </p:pic>
+      <p:sp>
+        <p:nvSpPr>
+          <p:cNvPr id="21" name="Text 18"/>
+          <p:cNvSpPr txBox="1"/>
+          <p:nvPr/>
+        </p:nvSpPr>
+        <p:spPr>
+          <a:xfrm>
+            <a:off x="9672015" y="91440"/>
+            <a:ext cx="1934464" cy="274320"/>
+          </a:xfrm>
+          <a:prstGeom prst="rect">
+            <a:avLst/>
+          </a:prstGeom>
+          <a:noFill/>
+          <a:ln/>
+        </p:spPr>
+        <p:txBody>
+          <a:bodyPr wrap="square" lIns="0" tIns="0" rIns="0" bIns="0" rtlCol="0" anchor="ctr"/>
+          <a:lstStyle/>
+          <a:p>
+            <a:pPr indent="0" marL="0">
+              <a:buNone/>
+            </a:pPr>
+            <a:r>
+              <a:rPr lang="en-US" sz="1100" b="1" dirty="0">
+                <a:solidFill>
+                  <a:srgbClr val="92400E"/>
+                </a:solidFill>
+                <a:latin typeface="Calibri" pitchFamily="34" charset="0"/>
+                <a:ea typeface="Calibri" pitchFamily="34" charset="-122"/>
+                <a:cs typeface="Calibri" pitchFamily="34" charset="-120"/>
+              </a:rPr>
+              <a:t>USE NOW</a:t>
+            </a:r>
+            <a:pPr indent="0" marL="0">
+              <a:buNone/>
+            </a:pPr>
+            <a:r>
+              <a:rPr lang="en-US" sz="1100" dirty="0">
+                <a:solidFill>
+                  <a:srgbClr val="92400E"/>
+                </a:solidFill>
+                <a:latin typeface="Calibri" pitchFamily="34" charset="0"/>
+                <a:ea typeface="Calibri" pitchFamily="34" charset="-122"/>
+                <a:cs typeface="Calibri" pitchFamily="34" charset="-120"/>
+              </a:rPr>
+              <a:t> · the PRG32 tools</a:t>
+            </a:r>
+            <a:endParaRPr lang="en-US" sz="1100" dirty="0"/>
+          </a:p>
+        </p:txBody>
+      </p:sp>
+      <p:sp>
+        <p:nvSpPr>
           <p:cNvPr id="25" name="Slide Number Placeholder 0"/>
           <p:cNvSpPr>
             <a:spLocks noGrp="1"/>
@@ -14000,6 +15436,158 @@
       </p:sp>
       <p:sp>
         <p:nvSpPr>
+          <p:cNvPr id="17" name="Shape 15"/>
+          <p:cNvSpPr/>
+          <p:nvPr/>
+        </p:nvSpPr>
+        <p:spPr>
+          <a:xfrm>
+            <a:off x="9287967" y="91440"/>
+            <a:ext cx="2355088" cy="274320"/>
+          </a:xfrm>
+          <a:prstGeom prst="rect">
+            <a:avLst/>
+          </a:prstGeom>
+          <a:solidFill>
+            <a:srgbClr val="FEF3C7"/>
+          </a:solidFill>
+          <a:ln w="12700">
+            <a:solidFill>
+              <a:srgbClr val="B45309"/>
+            </a:solidFill>
+            <a:prstDash val="solid"/>
+          </a:ln>
+        </p:spPr>
+      </p:sp>
+      <p:sp>
+        <p:nvSpPr>
+          <p:cNvPr id="18" name="Shape 16"/>
+          <p:cNvSpPr/>
+          <p:nvPr/>
+        </p:nvSpPr>
+        <p:spPr>
+          <a:xfrm>
+            <a:off x="9287967" y="91440"/>
+            <a:ext cx="27432" cy="274320"/>
+          </a:xfrm>
+          <a:prstGeom prst="rect">
+            <a:avLst/>
+          </a:prstGeom>
+          <a:solidFill>
+            <a:srgbClr val="B45309"/>
+          </a:solidFill>
+          <a:ln w="12700">
+            <a:solidFill>
+              <a:srgbClr val="B45309"/>
+            </a:solidFill>
+            <a:prstDash val="solid"/>
+          </a:ln>
+        </p:spPr>
+      </p:sp>
+      <p:sp>
+        <p:nvSpPr>
+          <p:cNvPr id="19" name="Shape 17"/>
+          <p:cNvSpPr/>
+          <p:nvPr/>
+        </p:nvSpPr>
+        <p:spPr>
+          <a:xfrm>
+            <a:off x="9342831" y="91440"/>
+            <a:ext cx="27432" cy="274320"/>
+          </a:xfrm>
+          <a:prstGeom prst="rect">
+            <a:avLst/>
+          </a:prstGeom>
+          <a:solidFill>
+            <a:srgbClr val="B45309"/>
+          </a:solidFill>
+          <a:ln w="12700">
+            <a:solidFill>
+              <a:srgbClr val="B45309"/>
+            </a:solidFill>
+            <a:prstDash val="solid"/>
+          </a:ln>
+        </p:spPr>
+      </p:sp>
+      <p:pic>
+        <p:nvPicPr>
+          <p:cNvPr id="20" name="Image 0" descr="preencoded.png">    </p:cNvPr>
+          <p:cNvPicPr>
+            <a:picLocks noChangeAspect="1"/>
+          </p:cNvPicPr>
+          <p:nvPr/>
+        </p:nvPicPr>
+        <p:blipFill>
+          <a:blip r:embed="rId1"/>
+          <a:stretch>
+            <a:fillRect/>
+          </a:stretch>
+        </p:blipFill>
+        <p:spPr>
+          <a:xfrm>
+            <a:off x="9415983" y="128016"/>
+            <a:ext cx="201168" cy="201168"/>
+          </a:xfrm>
+          <a:prstGeom prst="rect">
+            <a:avLst/>
+          </a:prstGeom>
+        </p:spPr>
+      </p:pic>
+      <p:sp>
+        <p:nvSpPr>
+          <p:cNvPr id="21" name="Text 18"/>
+          <p:cNvSpPr txBox="1"/>
+          <p:nvPr/>
+        </p:nvSpPr>
+        <p:spPr>
+          <a:xfrm>
+            <a:off x="9672015" y="91440"/>
+            <a:ext cx="1934464" cy="274320"/>
+          </a:xfrm>
+          <a:prstGeom prst="rect">
+            <a:avLst/>
+          </a:prstGeom>
+          <a:noFill/>
+          <a:ln/>
+        </p:spPr>
+        <p:txBody>
+          <a:bodyPr wrap="square" lIns="0" tIns="0" rIns="0" bIns="0" rtlCol="0" anchor="ctr"/>
+          <a:lstStyle/>
+          <a:p>
+            <a:pPr indent="0" marL="0">
+              <a:buNone/>
+            </a:pPr>
+            <a:r>
+              <a:rPr lang="en-US" sz="1100" b="1" dirty="0">
+                <a:solidFill>
+                  <a:srgbClr val="92400E"/>
+                </a:solidFill>
+                <a:latin typeface="Calibri" pitchFamily="34" charset="0"/>
+                <a:ea typeface="Calibri" pitchFamily="34" charset="-122"/>
+                <a:cs typeface="Calibri" pitchFamily="34" charset="-120"/>
+              </a:rPr>
+              <a:t>USE NOW</a:t>
+            </a:r>
+            <a:pPr indent="0" marL="0">
+              <a:buNone/>
+            </a:pPr>
+            <a:r>
+              <a:rPr lang="en-US" sz="1100" dirty="0">
+                <a:solidFill>
+                  <a:srgbClr val="92400E"/>
+                </a:solidFill>
+                <a:latin typeface="Calibri" pitchFamily="34" charset="0"/>
+                <a:ea typeface="Calibri" pitchFamily="34" charset="-122"/>
+                <a:cs typeface="Calibri" pitchFamily="34" charset="-120"/>
+              </a:rPr>
+              <a:t> · the PRG32 tools</a:t>
+            </a:r>
+            <a:endParaRPr lang="en-US" sz="1100" dirty="0"/>
+          </a:p>
+        </p:txBody>
+      </p:sp>
+      <p:sp>
+        <p:nvSpPr>
           <p:cNvPr id="25" name="Slide Number Placeholder 0"/>
           <p:cNvSpPr>
             <a:spLocks noGrp="1"/>
@@ -14831,6 +16419,158 @@
               <a:t>A black screen: check the wiring of the display against the firmware</a:t>
             </a:r>
             <a:endParaRPr lang="en-US" sz="1200" dirty="0"/>
+          </a:p>
+        </p:txBody>
+      </p:sp>
+      <p:sp>
+        <p:nvSpPr>
+          <p:cNvPr id="17" name="Shape 15"/>
+          <p:cNvSpPr/>
+          <p:nvPr/>
+        </p:nvSpPr>
+        <p:spPr>
+          <a:xfrm>
+            <a:off x="9287967" y="91440"/>
+            <a:ext cx="2355088" cy="274320"/>
+          </a:xfrm>
+          <a:prstGeom prst="rect">
+            <a:avLst/>
+          </a:prstGeom>
+          <a:solidFill>
+            <a:srgbClr val="FEF3C7"/>
+          </a:solidFill>
+          <a:ln w="12700">
+            <a:solidFill>
+              <a:srgbClr val="B45309"/>
+            </a:solidFill>
+            <a:prstDash val="solid"/>
+          </a:ln>
+        </p:spPr>
+      </p:sp>
+      <p:sp>
+        <p:nvSpPr>
+          <p:cNvPr id="18" name="Shape 16"/>
+          <p:cNvSpPr/>
+          <p:nvPr/>
+        </p:nvSpPr>
+        <p:spPr>
+          <a:xfrm>
+            <a:off x="9287967" y="91440"/>
+            <a:ext cx="27432" cy="274320"/>
+          </a:xfrm>
+          <a:prstGeom prst="rect">
+            <a:avLst/>
+          </a:prstGeom>
+          <a:solidFill>
+            <a:srgbClr val="B45309"/>
+          </a:solidFill>
+          <a:ln w="12700">
+            <a:solidFill>
+              <a:srgbClr val="B45309"/>
+            </a:solidFill>
+            <a:prstDash val="solid"/>
+          </a:ln>
+        </p:spPr>
+      </p:sp>
+      <p:sp>
+        <p:nvSpPr>
+          <p:cNvPr id="19" name="Shape 17"/>
+          <p:cNvSpPr/>
+          <p:nvPr/>
+        </p:nvSpPr>
+        <p:spPr>
+          <a:xfrm>
+            <a:off x="9342831" y="91440"/>
+            <a:ext cx="27432" cy="274320"/>
+          </a:xfrm>
+          <a:prstGeom prst="rect">
+            <a:avLst/>
+          </a:prstGeom>
+          <a:solidFill>
+            <a:srgbClr val="B45309"/>
+          </a:solidFill>
+          <a:ln w="12700">
+            <a:solidFill>
+              <a:srgbClr val="B45309"/>
+            </a:solidFill>
+            <a:prstDash val="solid"/>
+          </a:ln>
+        </p:spPr>
+      </p:sp>
+      <p:pic>
+        <p:nvPicPr>
+          <p:cNvPr id="20" name="Image 0" descr="preencoded.png">    </p:cNvPr>
+          <p:cNvPicPr>
+            <a:picLocks noChangeAspect="1"/>
+          </p:cNvPicPr>
+          <p:nvPr/>
+        </p:nvPicPr>
+        <p:blipFill>
+          <a:blip r:embed="rId1"/>
+          <a:stretch>
+            <a:fillRect/>
+          </a:stretch>
+        </p:blipFill>
+        <p:spPr>
+          <a:xfrm>
+            <a:off x="9415983" y="128016"/>
+            <a:ext cx="201168" cy="201168"/>
+          </a:xfrm>
+          <a:prstGeom prst="rect">
+            <a:avLst/>
+          </a:prstGeom>
+        </p:spPr>
+      </p:pic>
+      <p:sp>
+        <p:nvSpPr>
+          <p:cNvPr id="21" name="Text 18"/>
+          <p:cNvSpPr txBox="1"/>
+          <p:nvPr/>
+        </p:nvSpPr>
+        <p:spPr>
+          <a:xfrm>
+            <a:off x="9672015" y="91440"/>
+            <a:ext cx="1934464" cy="274320"/>
+          </a:xfrm>
+          <a:prstGeom prst="rect">
+            <a:avLst/>
+          </a:prstGeom>
+          <a:noFill/>
+          <a:ln/>
+        </p:spPr>
+        <p:txBody>
+          <a:bodyPr wrap="square" lIns="0" tIns="0" rIns="0" bIns="0" rtlCol="0" anchor="ctr"/>
+          <a:lstStyle/>
+          <a:p>
+            <a:pPr indent="0" marL="0">
+              <a:buNone/>
+            </a:pPr>
+            <a:r>
+              <a:rPr lang="en-US" sz="1100" b="1" dirty="0">
+                <a:solidFill>
+                  <a:srgbClr val="92400E"/>
+                </a:solidFill>
+                <a:latin typeface="Calibri" pitchFamily="34" charset="0"/>
+                <a:ea typeface="Calibri" pitchFamily="34" charset="-122"/>
+                <a:cs typeface="Calibri" pitchFamily="34" charset="-120"/>
+              </a:rPr>
+              <a:t>USE NOW</a:t>
+            </a:r>
+            <a:pPr indent="0" marL="0">
+              <a:buNone/>
+            </a:pPr>
+            <a:r>
+              <a:rPr lang="en-US" sz="1100" dirty="0">
+                <a:solidFill>
+                  <a:srgbClr val="92400E"/>
+                </a:solidFill>
+                <a:latin typeface="Calibri" pitchFamily="34" charset="0"/>
+                <a:ea typeface="Calibri" pitchFamily="34" charset="-122"/>
+                <a:cs typeface="Calibri" pitchFamily="34" charset="-120"/>
+              </a:rPr>
+              <a:t> · the PRG32 tools</a:t>
+            </a:r>
+            <a:endParaRPr lang="en-US" sz="1100" dirty="0"/>
           </a:p>
         </p:txBody>
       </p:sp>
@@ -16217,6 +17957,158 @@
       </p:graphicFrame>
       <p:sp>
         <p:nvSpPr>
+          <p:cNvPr id="4" name="Shape 1"/>
+          <p:cNvSpPr/>
+          <p:nvPr/>
+        </p:nvSpPr>
+        <p:spPr>
+          <a:xfrm>
+            <a:off x="9287967" y="91440"/>
+            <a:ext cx="2355088" cy="274320"/>
+          </a:xfrm>
+          <a:prstGeom prst="rect">
+            <a:avLst/>
+          </a:prstGeom>
+          <a:solidFill>
+            <a:srgbClr val="FEF3C7"/>
+          </a:solidFill>
+          <a:ln w="12700">
+            <a:solidFill>
+              <a:srgbClr val="B45309"/>
+            </a:solidFill>
+            <a:prstDash val="solid"/>
+          </a:ln>
+        </p:spPr>
+      </p:sp>
+      <p:sp>
+        <p:nvSpPr>
+          <p:cNvPr id="5" name="Shape 2"/>
+          <p:cNvSpPr/>
+          <p:nvPr/>
+        </p:nvSpPr>
+        <p:spPr>
+          <a:xfrm>
+            <a:off x="9287967" y="91440"/>
+            <a:ext cx="27432" cy="274320"/>
+          </a:xfrm>
+          <a:prstGeom prst="rect">
+            <a:avLst/>
+          </a:prstGeom>
+          <a:solidFill>
+            <a:srgbClr val="B45309"/>
+          </a:solidFill>
+          <a:ln w="12700">
+            <a:solidFill>
+              <a:srgbClr val="B45309"/>
+            </a:solidFill>
+            <a:prstDash val="solid"/>
+          </a:ln>
+        </p:spPr>
+      </p:sp>
+      <p:sp>
+        <p:nvSpPr>
+          <p:cNvPr id="6" name="Shape 3"/>
+          <p:cNvSpPr/>
+          <p:nvPr/>
+        </p:nvSpPr>
+        <p:spPr>
+          <a:xfrm>
+            <a:off x="9342831" y="91440"/>
+            <a:ext cx="27432" cy="274320"/>
+          </a:xfrm>
+          <a:prstGeom prst="rect">
+            <a:avLst/>
+          </a:prstGeom>
+          <a:solidFill>
+            <a:srgbClr val="B45309"/>
+          </a:solidFill>
+          <a:ln w="12700">
+            <a:solidFill>
+              <a:srgbClr val="B45309"/>
+            </a:solidFill>
+            <a:prstDash val="solid"/>
+          </a:ln>
+        </p:spPr>
+      </p:sp>
+      <p:pic>
+        <p:nvPicPr>
+          <p:cNvPr id="7" name="Image 0" descr="preencoded.png">    </p:cNvPr>
+          <p:cNvPicPr>
+            <a:picLocks noChangeAspect="1"/>
+          </p:cNvPicPr>
+          <p:nvPr/>
+        </p:nvPicPr>
+        <p:blipFill>
+          <a:blip r:embed="rId1"/>
+          <a:stretch>
+            <a:fillRect/>
+          </a:stretch>
+        </p:blipFill>
+        <p:spPr>
+          <a:xfrm>
+            <a:off x="9415983" y="128016"/>
+            <a:ext cx="201168" cy="201168"/>
+          </a:xfrm>
+          <a:prstGeom prst="rect">
+            <a:avLst/>
+          </a:prstGeom>
+        </p:spPr>
+      </p:pic>
+      <p:sp>
+        <p:nvSpPr>
+          <p:cNvPr id="8" name="Text 4"/>
+          <p:cNvSpPr txBox="1"/>
+          <p:nvPr/>
+        </p:nvSpPr>
+        <p:spPr>
+          <a:xfrm>
+            <a:off x="9672015" y="91440"/>
+            <a:ext cx="1934464" cy="274320"/>
+          </a:xfrm>
+          <a:prstGeom prst="rect">
+            <a:avLst/>
+          </a:prstGeom>
+          <a:noFill/>
+          <a:ln/>
+        </p:spPr>
+        <p:txBody>
+          <a:bodyPr wrap="square" lIns="0" tIns="0" rIns="0" bIns="0" rtlCol="0" anchor="ctr"/>
+          <a:lstStyle/>
+          <a:p>
+            <a:pPr indent="0" marL="0">
+              <a:buNone/>
+            </a:pPr>
+            <a:r>
+              <a:rPr lang="en-US" sz="1100" b="1" dirty="0">
+                <a:solidFill>
+                  <a:srgbClr val="92400E"/>
+                </a:solidFill>
+                <a:latin typeface="Calibri" pitchFamily="34" charset="0"/>
+                <a:ea typeface="Calibri" pitchFamily="34" charset="-122"/>
+                <a:cs typeface="Calibri" pitchFamily="34" charset="-120"/>
+              </a:rPr>
+              <a:t>USE NOW</a:t>
+            </a:r>
+            <a:pPr indent="0" marL="0">
+              <a:buNone/>
+            </a:pPr>
+            <a:r>
+              <a:rPr lang="en-US" sz="1100" dirty="0">
+                <a:solidFill>
+                  <a:srgbClr val="92400E"/>
+                </a:solidFill>
+                <a:latin typeface="Calibri" pitchFamily="34" charset="0"/>
+                <a:ea typeface="Calibri" pitchFamily="34" charset="-122"/>
+                <a:cs typeface="Calibri" pitchFamily="34" charset="-120"/>
+              </a:rPr>
+              <a:t> · the PRG32 tools</a:t>
+            </a:r>
+            <a:endParaRPr lang="en-US" sz="1100" dirty="0"/>
+          </a:p>
+        </p:txBody>
+      </p:sp>
+      <p:sp>
+        <p:nvSpPr>
           <p:cNvPr id="25" name="Slide Number Placeholder 0"/>
           <p:cNvSpPr>
             <a:spLocks noGrp="1"/>
@@ -17155,6 +19047,158 @@
       </p:sp>
       <p:sp>
         <p:nvSpPr>
+          <p:cNvPr id="5" name="Shape 3"/>
+          <p:cNvSpPr/>
+          <p:nvPr/>
+        </p:nvSpPr>
+        <p:spPr>
+          <a:xfrm>
+            <a:off x="9287967" y="91440"/>
+            <a:ext cx="2355088" cy="274320"/>
+          </a:xfrm>
+          <a:prstGeom prst="rect">
+            <a:avLst/>
+          </a:prstGeom>
+          <a:solidFill>
+            <a:srgbClr val="FEF3C7"/>
+          </a:solidFill>
+          <a:ln w="12700">
+            <a:solidFill>
+              <a:srgbClr val="B45309"/>
+            </a:solidFill>
+            <a:prstDash val="solid"/>
+          </a:ln>
+        </p:spPr>
+      </p:sp>
+      <p:sp>
+        <p:nvSpPr>
+          <p:cNvPr id="6" name="Shape 4"/>
+          <p:cNvSpPr/>
+          <p:nvPr/>
+        </p:nvSpPr>
+        <p:spPr>
+          <a:xfrm>
+            <a:off x="9287967" y="91440"/>
+            <a:ext cx="27432" cy="274320"/>
+          </a:xfrm>
+          <a:prstGeom prst="rect">
+            <a:avLst/>
+          </a:prstGeom>
+          <a:solidFill>
+            <a:srgbClr val="B45309"/>
+          </a:solidFill>
+          <a:ln w="12700">
+            <a:solidFill>
+              <a:srgbClr val="B45309"/>
+            </a:solidFill>
+            <a:prstDash val="solid"/>
+          </a:ln>
+        </p:spPr>
+      </p:sp>
+      <p:sp>
+        <p:nvSpPr>
+          <p:cNvPr id="7" name="Shape 5"/>
+          <p:cNvSpPr/>
+          <p:nvPr/>
+        </p:nvSpPr>
+        <p:spPr>
+          <a:xfrm>
+            <a:off x="9342831" y="91440"/>
+            <a:ext cx="27432" cy="274320"/>
+          </a:xfrm>
+          <a:prstGeom prst="rect">
+            <a:avLst/>
+          </a:prstGeom>
+          <a:solidFill>
+            <a:srgbClr val="B45309"/>
+          </a:solidFill>
+          <a:ln w="12700">
+            <a:solidFill>
+              <a:srgbClr val="B45309"/>
+            </a:solidFill>
+            <a:prstDash val="solid"/>
+          </a:ln>
+        </p:spPr>
+      </p:sp>
+      <p:pic>
+        <p:nvPicPr>
+          <p:cNvPr id="8" name="Image 0" descr="preencoded.png">    </p:cNvPr>
+          <p:cNvPicPr>
+            <a:picLocks noChangeAspect="1"/>
+          </p:cNvPicPr>
+          <p:nvPr/>
+        </p:nvPicPr>
+        <p:blipFill>
+          <a:blip r:embed="rId1"/>
+          <a:stretch>
+            <a:fillRect/>
+          </a:stretch>
+        </p:blipFill>
+        <p:spPr>
+          <a:xfrm>
+            <a:off x="9415983" y="128016"/>
+            <a:ext cx="201168" cy="201168"/>
+          </a:xfrm>
+          <a:prstGeom prst="rect">
+            <a:avLst/>
+          </a:prstGeom>
+        </p:spPr>
+      </p:pic>
+      <p:sp>
+        <p:nvSpPr>
+          <p:cNvPr id="9" name="Text 6"/>
+          <p:cNvSpPr txBox="1"/>
+          <p:nvPr/>
+        </p:nvSpPr>
+        <p:spPr>
+          <a:xfrm>
+            <a:off x="9672015" y="91440"/>
+            <a:ext cx="1934464" cy="274320"/>
+          </a:xfrm>
+          <a:prstGeom prst="rect">
+            <a:avLst/>
+          </a:prstGeom>
+          <a:noFill/>
+          <a:ln/>
+        </p:spPr>
+        <p:txBody>
+          <a:bodyPr wrap="square" lIns="0" tIns="0" rIns="0" bIns="0" rtlCol="0" anchor="ctr"/>
+          <a:lstStyle/>
+          <a:p>
+            <a:pPr indent="0" marL="0">
+              <a:buNone/>
+            </a:pPr>
+            <a:r>
+              <a:rPr lang="en-US" sz="1100" b="1" dirty="0">
+                <a:solidFill>
+                  <a:srgbClr val="92400E"/>
+                </a:solidFill>
+                <a:latin typeface="Calibri" pitchFamily="34" charset="0"/>
+                <a:ea typeface="Calibri" pitchFamily="34" charset="-122"/>
+                <a:cs typeface="Calibri" pitchFamily="34" charset="-120"/>
+              </a:rPr>
+              <a:t>USE NOW</a:t>
+            </a:r>
+            <a:pPr indent="0" marL="0">
+              <a:buNone/>
+            </a:pPr>
+            <a:r>
+              <a:rPr lang="en-US" sz="1100" dirty="0">
+                <a:solidFill>
+                  <a:srgbClr val="92400E"/>
+                </a:solidFill>
+                <a:latin typeface="Calibri" pitchFamily="34" charset="0"/>
+                <a:ea typeface="Calibri" pitchFamily="34" charset="-122"/>
+                <a:cs typeface="Calibri" pitchFamily="34" charset="-120"/>
+              </a:rPr>
+              <a:t> · the PRG32 tools</a:t>
+            </a:r>
+            <a:endParaRPr lang="en-US" sz="1100" dirty="0"/>
+          </a:p>
+        </p:txBody>
+      </p:sp>
+      <p:sp>
+        <p:nvSpPr>
           <p:cNvPr id="25" name="Slide Number Placeholder 0"/>
           <p:cNvSpPr>
             <a:spLocks noGrp="1"/>
@@ -18259,6 +20303,133 @@
       </p:sp>
       <p:sp>
         <p:nvSpPr>
+          <p:cNvPr id="17" name="Shape 15"/>
+          <p:cNvSpPr/>
+          <p:nvPr/>
+        </p:nvSpPr>
+        <p:spPr>
+          <a:xfrm>
+            <a:off x="9075623" y="91440"/>
+            <a:ext cx="2567432" cy="274320"/>
+          </a:xfrm>
+          <a:prstGeom prst="rect">
+            <a:avLst/>
+          </a:prstGeom>
+          <a:solidFill>
+            <a:srgbClr val="E0F2FE"/>
+          </a:solidFill>
+          <a:ln w="12700">
+            <a:solidFill>
+              <a:srgbClr val="0369A1"/>
+            </a:solidFill>
+            <a:prstDash val="solid"/>
+          </a:ln>
+        </p:spPr>
+      </p:sp>
+      <p:sp>
+        <p:nvSpPr>
+          <p:cNvPr id="18" name="Shape 16"/>
+          <p:cNvSpPr/>
+          <p:nvPr/>
+        </p:nvSpPr>
+        <p:spPr>
+          <a:xfrm>
+            <a:off x="9075623" y="91440"/>
+            <a:ext cx="73152" cy="274320"/>
+          </a:xfrm>
+          <a:prstGeom prst="rect">
+            <a:avLst/>
+          </a:prstGeom>
+          <a:solidFill>
+            <a:srgbClr val="0369A1"/>
+          </a:solidFill>
+          <a:ln w="12700">
+            <a:solidFill>
+              <a:srgbClr val="0369A1"/>
+            </a:solidFill>
+            <a:prstDash val="solid"/>
+          </a:ln>
+        </p:spPr>
+      </p:sp>
+      <p:pic>
+        <p:nvPicPr>
+          <p:cNvPr id="19" name="Image 0" descr="preencoded.png">    </p:cNvPr>
+          <p:cNvPicPr>
+            <a:picLocks noChangeAspect="1"/>
+          </p:cNvPicPr>
+          <p:nvPr/>
+        </p:nvPicPr>
+        <p:blipFill>
+          <a:blip r:embed="rId1"/>
+          <a:stretch>
+            <a:fillRect/>
+          </a:stretch>
+        </p:blipFill>
+        <p:spPr>
+          <a:xfrm>
+            <a:off x="9203639" y="128016"/>
+            <a:ext cx="201168" cy="201168"/>
+          </a:xfrm>
+          <a:prstGeom prst="rect">
+            <a:avLst/>
+          </a:prstGeom>
+        </p:spPr>
+      </p:pic>
+      <p:sp>
+        <p:nvSpPr>
+          <p:cNvPr id="20" name="Text 17"/>
+          <p:cNvSpPr txBox="1"/>
+          <p:nvPr/>
+        </p:nvSpPr>
+        <p:spPr>
+          <a:xfrm>
+            <a:off x="9459671" y="91440"/>
+            <a:ext cx="2146808" cy="274320"/>
+          </a:xfrm>
+          <a:prstGeom prst="rect">
+            <a:avLst/>
+          </a:prstGeom>
+          <a:noFill/>
+          <a:ln/>
+        </p:spPr>
+        <p:txBody>
+          <a:bodyPr wrap="square" lIns="0" tIns="0" rIns="0" bIns="0" rtlCol="0" anchor="ctr"/>
+          <a:lstStyle/>
+          <a:p>
+            <a:pPr indent="0" marL="0">
+              <a:buNone/>
+            </a:pPr>
+            <a:r>
+              <a:rPr lang="en-US" sz="1100" b="1" dirty="0">
+                <a:solidFill>
+                  <a:srgbClr val="075985"/>
+                </a:solidFill>
+                <a:latin typeface="Calibri" pitchFamily="34" charset="0"/>
+                <a:ea typeface="Calibri" pitchFamily="34" charset="-122"/>
+                <a:cs typeface="Calibri" pitchFamily="34" charset="-120"/>
+              </a:rPr>
+              <a:t>UNDERSTAND NOW</a:t>
+            </a:r>
+            <a:pPr indent="0" marL="0">
+              <a:buNone/>
+            </a:pPr>
+            <a:r>
+              <a:rPr lang="en-US" sz="1100" dirty="0">
+                <a:solidFill>
+                  <a:srgbClr val="075985"/>
+                </a:solidFill>
+                <a:latin typeface="Calibri" pitchFamily="34" charset="0"/>
+                <a:ea typeface="Calibri" pitchFamily="34" charset="-122"/>
+                <a:cs typeface="Calibri" pitchFamily="34" charset="-120"/>
+              </a:rPr>
+              <a:t> · bit masks</a:t>
+            </a:r>
+            <a:endParaRPr lang="en-US" sz="1100" dirty="0"/>
+          </a:p>
+        </p:txBody>
+      </p:sp>
+      <p:sp>
+        <p:nvSpPr>
           <p:cNvPr id="25" name="Slide Number Placeholder 0"/>
           <p:cNvSpPr>
             <a:spLocks noGrp="1"/>
@@ -19154,6 +21325,133 @@
       </p:sp>
       <p:sp>
         <p:nvSpPr>
+          <p:cNvPr id="17" name="Shape 15"/>
+          <p:cNvSpPr/>
+          <p:nvPr/>
+        </p:nvSpPr>
+        <p:spPr>
+          <a:xfrm>
+            <a:off x="8616010" y="91440"/>
+            <a:ext cx="3027045" cy="274320"/>
+          </a:xfrm>
+          <a:prstGeom prst="rect">
+            <a:avLst/>
+          </a:prstGeom>
+          <a:solidFill>
+            <a:srgbClr val="E0F2FE"/>
+          </a:solidFill>
+          <a:ln w="12700">
+            <a:solidFill>
+              <a:srgbClr val="0369A1"/>
+            </a:solidFill>
+            <a:prstDash val="solid"/>
+          </a:ln>
+        </p:spPr>
+      </p:sp>
+      <p:sp>
+        <p:nvSpPr>
+          <p:cNvPr id="18" name="Shape 16"/>
+          <p:cNvSpPr/>
+          <p:nvPr/>
+        </p:nvSpPr>
+        <p:spPr>
+          <a:xfrm>
+            <a:off x="8616010" y="91440"/>
+            <a:ext cx="73152" cy="274320"/>
+          </a:xfrm>
+          <a:prstGeom prst="rect">
+            <a:avLst/>
+          </a:prstGeom>
+          <a:solidFill>
+            <a:srgbClr val="0369A1"/>
+          </a:solidFill>
+          <a:ln w="12700">
+            <a:solidFill>
+              <a:srgbClr val="0369A1"/>
+            </a:solidFill>
+            <a:prstDash val="solid"/>
+          </a:ln>
+        </p:spPr>
+      </p:sp>
+      <p:pic>
+        <p:nvPicPr>
+          <p:cNvPr id="19" name="Image 0" descr="preencoded.png">    </p:cNvPr>
+          <p:cNvPicPr>
+            <a:picLocks noChangeAspect="1"/>
+          </p:cNvPicPr>
+          <p:nvPr/>
+        </p:nvPicPr>
+        <p:blipFill>
+          <a:blip r:embed="rId1"/>
+          <a:stretch>
+            <a:fillRect/>
+          </a:stretch>
+        </p:blipFill>
+        <p:spPr>
+          <a:xfrm>
+            <a:off x="8744026" y="128016"/>
+            <a:ext cx="201168" cy="201168"/>
+          </a:xfrm>
+          <a:prstGeom prst="rect">
+            <a:avLst/>
+          </a:prstGeom>
+        </p:spPr>
+      </p:pic>
+      <p:sp>
+        <p:nvSpPr>
+          <p:cNvPr id="20" name="Text 17"/>
+          <p:cNvSpPr txBox="1"/>
+          <p:nvPr/>
+        </p:nvSpPr>
+        <p:spPr>
+          <a:xfrm>
+            <a:off x="9000058" y="91440"/>
+            <a:ext cx="2606421" cy="274320"/>
+          </a:xfrm>
+          <a:prstGeom prst="rect">
+            <a:avLst/>
+          </a:prstGeom>
+          <a:noFill/>
+          <a:ln/>
+        </p:spPr>
+        <p:txBody>
+          <a:bodyPr wrap="square" lIns="0" tIns="0" rIns="0" bIns="0" rtlCol="0" anchor="ctr"/>
+          <a:lstStyle/>
+          <a:p>
+            <a:pPr indent="0" marL="0">
+              <a:buNone/>
+            </a:pPr>
+            <a:r>
+              <a:rPr lang="en-US" sz="1100" b="1" dirty="0">
+                <a:solidFill>
+                  <a:srgbClr val="075985"/>
+                </a:solidFill>
+                <a:latin typeface="Calibri" pitchFamily="34" charset="0"/>
+                <a:ea typeface="Calibri" pitchFamily="34" charset="-122"/>
+                <a:cs typeface="Calibri" pitchFamily="34" charset="-120"/>
+              </a:rPr>
+              <a:t>UNDERSTAND NOW</a:t>
+            </a:r>
+            <a:pPr indent="0" marL="0">
+              <a:buNone/>
+            </a:pPr>
+            <a:r>
+              <a:rPr lang="en-US" sz="1100" dirty="0">
+                <a:solidFill>
+                  <a:srgbClr val="075985"/>
+                </a:solidFill>
+                <a:latin typeface="Calibri" pitchFamily="34" charset="0"/>
+                <a:ea typeface="Calibri" pitchFamily="34" charset="-122"/>
+                <a:cs typeface="Calibri" pitchFamily="34" charset="-120"/>
+              </a:rPr>
+              <a:t> · arrays in memory</a:t>
+            </a:r>
+            <a:endParaRPr lang="en-US" sz="1100" dirty="0"/>
+          </a:p>
+        </p:txBody>
+      </p:sp>
+      <p:sp>
+        <p:nvSpPr>
           <p:cNvPr id="25" name="Slide Number Placeholder 0"/>
           <p:cNvSpPr>
             <a:spLocks noGrp="1"/>
@@ -20278,6 +22576,133 @@
       </p:sp>
       <p:sp>
         <p:nvSpPr>
+          <p:cNvPr id="17" name="Shape 15"/>
+          <p:cNvSpPr/>
+          <p:nvPr/>
+        </p:nvSpPr>
+        <p:spPr>
+          <a:xfrm>
+            <a:off x="9075623" y="91440"/>
+            <a:ext cx="2567432" cy="274320"/>
+          </a:xfrm>
+          <a:prstGeom prst="rect">
+            <a:avLst/>
+          </a:prstGeom>
+          <a:solidFill>
+            <a:srgbClr val="E0F2FE"/>
+          </a:solidFill>
+          <a:ln w="12700">
+            <a:solidFill>
+              <a:srgbClr val="0369A1"/>
+            </a:solidFill>
+            <a:prstDash val="solid"/>
+          </a:ln>
+        </p:spPr>
+      </p:sp>
+      <p:sp>
+        <p:nvSpPr>
+          <p:cNvPr id="18" name="Shape 16"/>
+          <p:cNvSpPr/>
+          <p:nvPr/>
+        </p:nvSpPr>
+        <p:spPr>
+          <a:xfrm>
+            <a:off x="9075623" y="91440"/>
+            <a:ext cx="73152" cy="274320"/>
+          </a:xfrm>
+          <a:prstGeom prst="rect">
+            <a:avLst/>
+          </a:prstGeom>
+          <a:solidFill>
+            <a:srgbClr val="0369A1"/>
+          </a:solidFill>
+          <a:ln w="12700">
+            <a:solidFill>
+              <a:srgbClr val="0369A1"/>
+            </a:solidFill>
+            <a:prstDash val="solid"/>
+          </a:ln>
+        </p:spPr>
+      </p:sp>
+      <p:pic>
+        <p:nvPicPr>
+          <p:cNvPr id="19" name="Image 0" descr="preencoded.png">    </p:cNvPr>
+          <p:cNvPicPr>
+            <a:picLocks noChangeAspect="1"/>
+          </p:cNvPicPr>
+          <p:nvPr/>
+        </p:nvPicPr>
+        <p:blipFill>
+          <a:blip r:embed="rId1"/>
+          <a:stretch>
+            <a:fillRect/>
+          </a:stretch>
+        </p:blipFill>
+        <p:spPr>
+          <a:xfrm>
+            <a:off x="9203639" y="128016"/>
+            <a:ext cx="201168" cy="201168"/>
+          </a:xfrm>
+          <a:prstGeom prst="rect">
+            <a:avLst/>
+          </a:prstGeom>
+        </p:spPr>
+      </p:pic>
+      <p:sp>
+        <p:nvSpPr>
+          <p:cNvPr id="20" name="Text 17"/>
+          <p:cNvSpPr txBox="1"/>
+          <p:nvPr/>
+        </p:nvSpPr>
+        <p:spPr>
+          <a:xfrm>
+            <a:off x="9459671" y="91440"/>
+            <a:ext cx="2146808" cy="274320"/>
+          </a:xfrm>
+          <a:prstGeom prst="rect">
+            <a:avLst/>
+          </a:prstGeom>
+          <a:noFill/>
+          <a:ln/>
+        </p:spPr>
+        <p:txBody>
+          <a:bodyPr wrap="square" lIns="0" tIns="0" rIns="0" bIns="0" rtlCol="0" anchor="ctr"/>
+          <a:lstStyle/>
+          <a:p>
+            <a:pPr indent="0" marL="0">
+              <a:buNone/>
+            </a:pPr>
+            <a:r>
+              <a:rPr lang="en-US" sz="1100" b="1" dirty="0">
+                <a:solidFill>
+                  <a:srgbClr val="075985"/>
+                </a:solidFill>
+                <a:latin typeface="Calibri" pitchFamily="34" charset="0"/>
+                <a:ea typeface="Calibri" pitchFamily="34" charset="-122"/>
+                <a:cs typeface="Calibri" pitchFamily="34" charset="-120"/>
+              </a:rPr>
+              <a:t>UNDERSTAND NOW</a:t>
+            </a:r>
+            <a:pPr indent="0" marL="0">
+              <a:buNone/>
+            </a:pPr>
+            <a:r>
+              <a:rPr lang="en-US" sz="1100" dirty="0">
+                <a:solidFill>
+                  <a:srgbClr val="075985"/>
+                </a:solidFill>
+                <a:latin typeface="Calibri" pitchFamily="34" charset="0"/>
+                <a:ea typeface="Calibri" pitchFamily="34" charset="-122"/>
+                <a:cs typeface="Calibri" pitchFamily="34" charset="-120"/>
+              </a:rPr>
+              <a:t> · bit masks</a:t>
+            </a:r>
+            <a:endParaRPr lang="en-US" sz="1100" dirty="0"/>
+          </a:p>
+        </p:txBody>
+      </p:sp>
+      <p:sp>
+        <p:nvSpPr>
           <p:cNvPr id="25" name="Slide Number Placeholder 0"/>
           <p:cNvSpPr>
             <a:spLocks noGrp="1"/>
@@ -21043,6 +23468,133 @@
       </p:sp>
       <p:sp>
         <p:nvSpPr>
+          <p:cNvPr id="14" name="Shape 12"/>
+          <p:cNvSpPr/>
+          <p:nvPr/>
+        </p:nvSpPr>
+        <p:spPr>
+          <a:xfrm>
+            <a:off x="8944305" y="91440"/>
+            <a:ext cx="2698750" cy="274320"/>
+          </a:xfrm>
+          <a:prstGeom prst="rect">
+            <a:avLst/>
+          </a:prstGeom>
+          <a:solidFill>
+            <a:srgbClr val="E0F2FE"/>
+          </a:solidFill>
+          <a:ln w="12700">
+            <a:solidFill>
+              <a:srgbClr val="0369A1"/>
+            </a:solidFill>
+            <a:prstDash val="solid"/>
+          </a:ln>
+        </p:spPr>
+      </p:sp>
+      <p:sp>
+        <p:nvSpPr>
+          <p:cNvPr id="15" name="Shape 13"/>
+          <p:cNvSpPr/>
+          <p:nvPr/>
+        </p:nvSpPr>
+        <p:spPr>
+          <a:xfrm>
+            <a:off x="8944305" y="91440"/>
+            <a:ext cx="73152" cy="274320"/>
+          </a:xfrm>
+          <a:prstGeom prst="rect">
+            <a:avLst/>
+          </a:prstGeom>
+          <a:solidFill>
+            <a:srgbClr val="0369A1"/>
+          </a:solidFill>
+          <a:ln w="12700">
+            <a:solidFill>
+              <a:srgbClr val="0369A1"/>
+            </a:solidFill>
+            <a:prstDash val="solid"/>
+          </a:ln>
+        </p:spPr>
+      </p:sp>
+      <p:pic>
+        <p:nvPicPr>
+          <p:cNvPr id="16" name="Image 0" descr="preencoded.png">    </p:cNvPr>
+          <p:cNvPicPr>
+            <a:picLocks noChangeAspect="1"/>
+          </p:cNvPicPr>
+          <p:nvPr/>
+        </p:nvPicPr>
+        <p:blipFill>
+          <a:blip r:embed="rId1"/>
+          <a:stretch>
+            <a:fillRect/>
+          </a:stretch>
+        </p:blipFill>
+        <p:spPr>
+          <a:xfrm>
+            <a:off x="9072321" y="128016"/>
+            <a:ext cx="201168" cy="201168"/>
+          </a:xfrm>
+          <a:prstGeom prst="rect">
+            <a:avLst/>
+          </a:prstGeom>
+        </p:spPr>
+      </p:pic>
+      <p:sp>
+        <p:nvSpPr>
+          <p:cNvPr id="17" name="Text 14"/>
+          <p:cNvSpPr txBox="1"/>
+          <p:nvPr/>
+        </p:nvSpPr>
+        <p:spPr>
+          <a:xfrm>
+            <a:off x="9328353" y="91440"/>
+            <a:ext cx="2278126" cy="274320"/>
+          </a:xfrm>
+          <a:prstGeom prst="rect">
+            <a:avLst/>
+          </a:prstGeom>
+          <a:noFill/>
+          <a:ln/>
+        </p:spPr>
+        <p:txBody>
+          <a:bodyPr wrap="square" lIns="0" tIns="0" rIns="0" bIns="0" rtlCol="0" anchor="ctr"/>
+          <a:lstStyle/>
+          <a:p>
+            <a:pPr indent="0" marL="0">
+              <a:buNone/>
+            </a:pPr>
+            <a:r>
+              <a:rPr lang="en-US" sz="1100" b="1" dirty="0">
+                <a:solidFill>
+                  <a:srgbClr val="075985"/>
+                </a:solidFill>
+                <a:latin typeface="Calibri" pitchFamily="34" charset="0"/>
+                <a:ea typeface="Calibri" pitchFamily="34" charset="-122"/>
+                <a:cs typeface="Calibri" pitchFamily="34" charset="-120"/>
+              </a:rPr>
+              <a:t>UNDERSTAND NOW</a:t>
+            </a:r>
+            <a:pPr indent="0" marL="0">
+              <a:buNone/>
+            </a:pPr>
+            <a:r>
+              <a:rPr lang="en-US" sz="1100" dirty="0">
+                <a:solidFill>
+                  <a:srgbClr val="075985"/>
+                </a:solidFill>
+                <a:latin typeface="Calibri" pitchFamily="34" charset="0"/>
+                <a:ea typeface="Calibri" pitchFamily="34" charset="-122"/>
+                <a:cs typeface="Calibri" pitchFamily="34" charset="-120"/>
+              </a:rPr>
+              <a:t> · fixed point</a:t>
+            </a:r>
+            <a:endParaRPr lang="en-US" sz="1100" dirty="0"/>
+          </a:p>
+        </p:txBody>
+      </p:sp>
+      <p:sp>
+        <p:nvSpPr>
           <p:cNvPr id="25" name="Slide Number Placeholder 0"/>
           <p:cNvSpPr>
             <a:spLocks noGrp="1"/>
@@ -21952,6 +24504,133 @@
       </p:sp>
       <p:sp>
         <p:nvSpPr>
+          <p:cNvPr id="17" name="Shape 15"/>
+          <p:cNvSpPr/>
+          <p:nvPr/>
+        </p:nvSpPr>
+        <p:spPr>
+          <a:xfrm>
+            <a:off x="8878646" y="91440"/>
+            <a:ext cx="2764409" cy="274320"/>
+          </a:xfrm>
+          <a:prstGeom prst="rect">
+            <a:avLst/>
+          </a:prstGeom>
+          <a:solidFill>
+            <a:srgbClr val="E0F2FE"/>
+          </a:solidFill>
+          <a:ln w="12700">
+            <a:solidFill>
+              <a:srgbClr val="0369A1"/>
+            </a:solidFill>
+            <a:prstDash val="solid"/>
+          </a:ln>
+        </p:spPr>
+      </p:sp>
+      <p:sp>
+        <p:nvSpPr>
+          <p:cNvPr id="18" name="Shape 16"/>
+          <p:cNvSpPr/>
+          <p:nvPr/>
+        </p:nvSpPr>
+        <p:spPr>
+          <a:xfrm>
+            <a:off x="8878646" y="91440"/>
+            <a:ext cx="73152" cy="274320"/>
+          </a:xfrm>
+          <a:prstGeom prst="rect">
+            <a:avLst/>
+          </a:prstGeom>
+          <a:solidFill>
+            <a:srgbClr val="0369A1"/>
+          </a:solidFill>
+          <a:ln w="12700">
+            <a:solidFill>
+              <a:srgbClr val="0369A1"/>
+            </a:solidFill>
+            <a:prstDash val="solid"/>
+          </a:ln>
+        </p:spPr>
+      </p:sp>
+      <p:pic>
+        <p:nvPicPr>
+          <p:cNvPr id="19" name="Image 0" descr="preencoded.png">    </p:cNvPr>
+          <p:cNvPicPr>
+            <a:picLocks noChangeAspect="1"/>
+          </p:cNvPicPr>
+          <p:nvPr/>
+        </p:nvPicPr>
+        <p:blipFill>
+          <a:blip r:embed="rId1"/>
+          <a:stretch>
+            <a:fillRect/>
+          </a:stretch>
+        </p:blipFill>
+        <p:spPr>
+          <a:xfrm>
+            <a:off x="9006662" y="128016"/>
+            <a:ext cx="201168" cy="201168"/>
+          </a:xfrm>
+          <a:prstGeom prst="rect">
+            <a:avLst/>
+          </a:prstGeom>
+        </p:spPr>
+      </p:pic>
+      <p:sp>
+        <p:nvSpPr>
+          <p:cNvPr id="20" name="Text 17"/>
+          <p:cNvSpPr txBox="1"/>
+          <p:nvPr/>
+        </p:nvSpPr>
+        <p:spPr>
+          <a:xfrm>
+            <a:off x="9262694" y="91440"/>
+            <a:ext cx="2343785" cy="274320"/>
+          </a:xfrm>
+          <a:prstGeom prst="rect">
+            <a:avLst/>
+          </a:prstGeom>
+          <a:noFill/>
+          <a:ln/>
+        </p:spPr>
+        <p:txBody>
+          <a:bodyPr wrap="square" lIns="0" tIns="0" rIns="0" bIns="0" rtlCol="0" anchor="ctr"/>
+          <a:lstStyle/>
+          <a:p>
+            <a:pPr indent="0" marL="0">
+              <a:buNone/>
+            </a:pPr>
+            <a:r>
+              <a:rPr lang="en-US" sz="1100" b="1" dirty="0">
+                <a:solidFill>
+                  <a:srgbClr val="075985"/>
+                </a:solidFill>
+                <a:latin typeface="Calibri" pitchFamily="34" charset="0"/>
+                <a:ea typeface="Calibri" pitchFamily="34" charset="-122"/>
+                <a:cs typeface="Calibri" pitchFamily="34" charset="-120"/>
+              </a:rPr>
+              <a:t>UNDERSTAND NOW</a:t>
+            </a:r>
+            <a:pPr indent="0" marL="0">
+              <a:buNone/>
+            </a:pPr>
+            <a:r>
+              <a:rPr lang="en-US" sz="1100" dirty="0">
+                <a:solidFill>
+                  <a:srgbClr val="075985"/>
+                </a:solidFill>
+                <a:latin typeface="Calibri" pitchFamily="34" charset="0"/>
+                <a:ea typeface="Calibri" pitchFamily="34" charset="-122"/>
+                <a:cs typeface="Calibri" pitchFamily="34" charset="-120"/>
+              </a:rPr>
+              <a:t> · multiplexers</a:t>
+            </a:r>
+            <a:endParaRPr lang="en-US" sz="1100" dirty="0"/>
+          </a:p>
+        </p:txBody>
+      </p:sp>
+      <p:sp>
+        <p:nvSpPr>
           <p:cNvPr id="25" name="Slide Number Placeholder 0"/>
           <p:cNvSpPr>
             <a:spLocks noGrp="1"/>
@@ -22924,6 +25603,133 @@
               <a:t>t4 and t6 keep the new cell for the next slide</a:t>
             </a:r>
             <a:endParaRPr lang="en-US" sz="1500" dirty="0"/>
+          </a:p>
+        </p:txBody>
+      </p:sp>
+      <p:sp>
+        <p:nvSpPr>
+          <p:cNvPr id="17" name="Shape 15"/>
+          <p:cNvSpPr/>
+          <p:nvPr/>
+        </p:nvSpPr>
+        <p:spPr>
+          <a:xfrm>
+            <a:off x="7631125" y="91440"/>
+            <a:ext cx="4011930" cy="274320"/>
+          </a:xfrm>
+          <a:prstGeom prst="rect">
+            <a:avLst/>
+          </a:prstGeom>
+          <a:solidFill>
+            <a:srgbClr val="E0F2FE"/>
+          </a:solidFill>
+          <a:ln w="12700">
+            <a:solidFill>
+              <a:srgbClr val="0369A1"/>
+            </a:solidFill>
+            <a:prstDash val="solid"/>
+          </a:ln>
+        </p:spPr>
+      </p:sp>
+      <p:sp>
+        <p:nvSpPr>
+          <p:cNvPr id="18" name="Shape 16"/>
+          <p:cNvSpPr/>
+          <p:nvPr/>
+        </p:nvSpPr>
+        <p:spPr>
+          <a:xfrm>
+            <a:off x="7631125" y="91440"/>
+            <a:ext cx="73152" cy="274320"/>
+          </a:xfrm>
+          <a:prstGeom prst="rect">
+            <a:avLst/>
+          </a:prstGeom>
+          <a:solidFill>
+            <a:srgbClr val="0369A1"/>
+          </a:solidFill>
+          <a:ln w="12700">
+            <a:solidFill>
+              <a:srgbClr val="0369A1"/>
+            </a:solidFill>
+            <a:prstDash val="solid"/>
+          </a:ln>
+        </p:spPr>
+      </p:sp>
+      <p:pic>
+        <p:nvPicPr>
+          <p:cNvPr id="19" name="Image 0" descr="preencoded.png">    </p:cNvPr>
+          <p:cNvPicPr>
+            <a:picLocks noChangeAspect="1"/>
+          </p:cNvPicPr>
+          <p:nvPr/>
+        </p:nvPicPr>
+        <p:blipFill>
+          <a:blip r:embed="rId1"/>
+          <a:stretch>
+            <a:fillRect/>
+          </a:stretch>
+        </p:blipFill>
+        <p:spPr>
+          <a:xfrm>
+            <a:off x="7759141" y="128016"/>
+            <a:ext cx="201168" cy="201168"/>
+          </a:xfrm>
+          <a:prstGeom prst="rect">
+            <a:avLst/>
+          </a:prstGeom>
+        </p:spPr>
+      </p:pic>
+      <p:sp>
+        <p:nvSpPr>
+          <p:cNvPr id="20" name="Text 17"/>
+          <p:cNvSpPr txBox="1"/>
+          <p:nvPr/>
+        </p:nvSpPr>
+        <p:spPr>
+          <a:xfrm>
+            <a:off x="8015173" y="91440"/>
+            <a:ext cx="3591306" cy="274320"/>
+          </a:xfrm>
+          <a:prstGeom prst="rect">
+            <a:avLst/>
+          </a:prstGeom>
+          <a:noFill/>
+          <a:ln/>
+        </p:spPr>
+        <p:txBody>
+          <a:bodyPr wrap="square" lIns="0" tIns="0" rIns="0" bIns="0" rtlCol="0" anchor="ctr"/>
+          <a:lstStyle/>
+          <a:p>
+            <a:pPr indent="0" marL="0">
+              <a:buNone/>
+            </a:pPr>
+            <a:r>
+              <a:rPr lang="en-US" sz="1100" b="1" dirty="0">
+                <a:solidFill>
+                  <a:srgbClr val="075985"/>
+                </a:solidFill>
+                <a:latin typeface="Calibri" pitchFamily="34" charset="0"/>
+                <a:ea typeface="Calibri" pitchFamily="34" charset="-122"/>
+                <a:cs typeface="Calibri" pitchFamily="34" charset="-120"/>
+              </a:rPr>
+              <a:t>UNDERSTAND NOW</a:t>
+            </a:r>
+            <a:pPr indent="0" marL="0">
+              <a:buNone/>
+            </a:pPr>
+            <a:r>
+              <a:rPr lang="en-US" sz="1100" dirty="0">
+                <a:solidFill>
+                  <a:srgbClr val="075985"/>
+                </a:solidFill>
+                <a:latin typeface="Calibri" pitchFamily="34" charset="0"/>
+                <a:ea typeface="Calibri" pitchFamily="34" charset="-122"/>
+                <a:cs typeface="Calibri" pitchFamily="34" charset="-120"/>
+              </a:rPr>
+              <a:t> · signed or unsigned instructions</a:t>
+            </a:r>
+            <a:endParaRPr lang="en-US" sz="1100" dirty="0"/>
           </a:p>
         </p:txBody>
       </p:sp>

--- a/en/slides/12-Computer_Architecture-Verm1_Part_2-Code.pptx
+++ b/en/slides/12-Computer_Architecture-Verm1_Part_2-Code.pptx
@@ -131,24 +131,24 @@
   <p:extLst>
     <p:ext uri="{521415D9-36F7-43E2-AB2F-B90AF26B5E84}">
       <p14:sectionLst xmlns:p14="http://schemas.microsoft.com/office/powerpoint/2010/main">
-        <p14:section name="Opening" id="{37135e02-3563-3c3c-11a2-f188c06d54d4}">
+        <p14:section name="Opening" id="{14eda316-91f9-aec0-c4f9-e59b63712d1e}">
           <p14:sldIdLst>
             <p14:sldId id="256"/>
             <p14:sldId id="257"/>
           </p14:sldIdLst>
         </p14:section>
-        <p14:section name="The listings" id="{0169ec41-76b4-a940-6e7d-5b2c65ff2a5e}">
+        <p14:section name="The listings" id="{4263ba5c-0606-2afd-a935-9e03adb4769e}">
           <p14:sldIdLst>
             <p14:sldId id="258"/>
           </p14:sldIdLst>
         </p14:section>
-        <p14:section name="Step 1: names for bits" id="{12be490b-aadb-b9bc-fddd-6c3f559defbd}">
+        <p14:section name="Step 1: names for bits" id="{c606775e-c376-ff74-9f44-b3c76b153749}">
           <p14:sldIdLst>
             <p14:sldId id="259"/>
             <p14:sldId id="260"/>
           </p14:sldIdLst>
         </p14:section>
-        <p14:section name="Step 2: steering" id="{ac7ae535-2c9f-fc78-798e-a61fb347c97f}">
+        <p14:section name="Step 2: steering" id="{d462dcdb-8cd5-7919-8cb8-5301e2a154e8}">
           <p14:sldIdLst>
             <p14:sldId id="261"/>
             <p14:sldId id="262"/>
@@ -158,7 +158,7 @@
             <p14:sldId id="266"/>
           </p14:sldIdLst>
         </p14:section>
-        <p14:section name="Step 3: food, a score, a sound" id="{d84ee47f-c216-9010-d955-088028ba0eb9}">
+        <p14:section name="Step 3: food, a score, a sound" id="{acccd259-877c-ef3d-3d0f-02ffdd696163}">
           <p14:sldIdLst>
             <p14:sldId id="267"/>
             <p14:sldId id="268"/>
@@ -170,7 +170,7 @@
             <p14:sldId id="274"/>
           </p14:sldIdLst>
         </p14:section>
-        <p14:section name="Run it and test it" id="{ca7678f6-1da8-b943-eff7-34961a1e27ab}">
+        <p14:section name="Run it and test it" id="{a3c18a10-6d57-4824-9784-d9e547448d42}">
           <p14:sldIdLst>
             <p14:sldId id="275"/>
             <p14:sldId id="276"/>
@@ -179,7 +179,7 @@
             <p14:sldId id="279"/>
           </p14:sldIdLst>
         </p14:section>
-        <p14:section name="Exercises" id="{6b1e5a48-dc92-ee62-6952-a7bc0c4b5f01}">
+        <p14:section name="Exercises" id="{a36f98c6-bdac-b131-18e6-276b5edab033}">
           <p14:sldIdLst>
             <p14:sldId id="280"/>
           </p14:sldIdLst>
